--- a/documents/Sprint_Review2.pptx
+++ b/documents/Sprint_Review2.pptx
@@ -4,15 +4,17 @@
   <p:sldMasterIdLst>
     <p:sldMasterId id="2147483648" r:id="rId2"/>
     <p:sldMasterId id="2147483661" r:id="rId3"/>
+    <p:sldMasterId id="2147483674" r:id="rId4"/>
   </p:sldMasterIdLst>
   <p:sldIdLst>
-    <p:sldId id="256" r:id="rId4"/>
-    <p:sldId id="257" r:id="rId5"/>
-    <p:sldId id="258" r:id="rId6"/>
-    <p:sldId id="259" r:id="rId7"/>
-    <p:sldId id="260" r:id="rId8"/>
-    <p:sldId id="261" r:id="rId9"/>
-    <p:sldId id="262" r:id="rId10"/>
+    <p:sldId id="256" r:id="rId5"/>
+    <p:sldId id="257" r:id="rId6"/>
+    <p:sldId id="258" r:id="rId7"/>
+    <p:sldId id="259" r:id="rId8"/>
+    <p:sldId id="260" r:id="rId9"/>
+    <p:sldId id="261" r:id="rId10"/>
+    <p:sldId id="262" r:id="rId11"/>
+    <p:sldId id="263" r:id="rId12"/>
   </p:sldIdLst>
   <p:sldSz cx="12192000" cy="6858000"/>
   <p:notesSz cx="7559675" cy="10691813"/>
@@ -71,7 +73,7 @@
         <p:spPr>
           <a:xfrm>
             <a:off x="576000" y="2138040"/>
-            <a:ext cx="11036160" cy="1145160"/>
+            <a:ext cx="11035800" cy="1144800"/>
           </a:xfrm>
           <a:prstGeom prst="rect">
             <a:avLst/>
@@ -108,7 +110,7 @@
         <p:spPr>
           <a:xfrm>
             <a:off x="609480" y="1604520"/>
-            <a:ext cx="10972440" cy="1896840"/>
+            <a:ext cx="10972080" cy="1896840"/>
           </a:xfrm>
           <a:prstGeom prst="rect">
             <a:avLst/>
@@ -148,7 +150,7 @@
         <p:spPr>
           <a:xfrm>
             <a:off x="609480" y="3682080"/>
-            <a:ext cx="10972440" cy="1896840"/>
+            <a:ext cx="10972080" cy="1896840"/>
           </a:xfrm>
           <a:prstGeom prst="rect">
             <a:avLst/>
@@ -210,7 +212,7 @@
         <p:spPr>
           <a:xfrm>
             <a:off x="576000" y="2138040"/>
-            <a:ext cx="11036160" cy="1145160"/>
+            <a:ext cx="11035800" cy="1144800"/>
           </a:xfrm>
           <a:prstGeom prst="rect">
             <a:avLst/>
@@ -429,7 +431,7 @@
         <p:spPr>
           <a:xfrm>
             <a:off x="576000" y="2138040"/>
-            <a:ext cx="11036160" cy="1145160"/>
+            <a:ext cx="11035800" cy="1144800"/>
           </a:xfrm>
           <a:prstGeom prst="rect">
             <a:avLst/>
@@ -466,7 +468,7 @@
         <p:spPr>
           <a:xfrm>
             <a:off x="609480" y="1604520"/>
-            <a:ext cx="3533040" cy="1896840"/>
+            <a:ext cx="3532680" cy="1896840"/>
           </a:xfrm>
           <a:prstGeom prst="rect">
             <a:avLst/>
@@ -505,8 +507,8 @@
         </p:nvSpPr>
         <p:spPr>
           <a:xfrm>
-            <a:off x="4319640" y="1604520"/>
-            <a:ext cx="3533040" cy="1896840"/>
+            <a:off x="4319280" y="1604520"/>
+            <a:ext cx="3532680" cy="1896840"/>
           </a:xfrm>
           <a:prstGeom prst="rect">
             <a:avLst/>
@@ -545,8 +547,8 @@
         </p:nvSpPr>
         <p:spPr>
           <a:xfrm>
-            <a:off x="8029800" y="1604520"/>
-            <a:ext cx="3533040" cy="1896840"/>
+            <a:off x="8028720" y="1604520"/>
+            <a:ext cx="3532680" cy="1896840"/>
           </a:xfrm>
           <a:prstGeom prst="rect">
             <a:avLst/>
@@ -586,7 +588,7 @@
         <p:spPr>
           <a:xfrm>
             <a:off x="609480" y="3682080"/>
-            <a:ext cx="3533040" cy="1896840"/>
+            <a:ext cx="3532680" cy="1896840"/>
           </a:xfrm>
           <a:prstGeom prst="rect">
             <a:avLst/>
@@ -625,8 +627,8 @@
         </p:nvSpPr>
         <p:spPr>
           <a:xfrm>
-            <a:off x="4319640" y="3682080"/>
-            <a:ext cx="3533040" cy="1896840"/>
+            <a:off x="4319280" y="3682080"/>
+            <a:ext cx="3532680" cy="1896840"/>
           </a:xfrm>
           <a:prstGeom prst="rect">
             <a:avLst/>
@@ -665,8 +667,8 @@
         </p:nvSpPr>
         <p:spPr>
           <a:xfrm>
-            <a:off x="8029800" y="3682080"/>
-            <a:ext cx="3533040" cy="1896840"/>
+            <a:off x="8028720" y="3682080"/>
+            <a:ext cx="3532680" cy="1896840"/>
           </a:xfrm>
           <a:prstGeom prst="rect">
             <a:avLst/>
@@ -750,7 +752,7 @@
         <p:spPr>
           <a:xfrm>
             <a:off x="576000" y="2138040"/>
-            <a:ext cx="11036160" cy="1145160"/>
+            <a:ext cx="11035800" cy="1144800"/>
           </a:xfrm>
           <a:prstGeom prst="rect">
             <a:avLst/>
@@ -787,7 +789,7 @@
         <p:spPr>
           <a:xfrm>
             <a:off x="609480" y="1604520"/>
-            <a:ext cx="10972440" cy="3977280"/>
+            <a:ext cx="10972080" cy="3976920"/>
           </a:xfrm>
           <a:prstGeom prst="rect">
             <a:avLst/>
@@ -846,7 +848,7 @@
         <p:spPr>
           <a:xfrm>
             <a:off x="576000" y="2138040"/>
-            <a:ext cx="11036160" cy="1145160"/>
+            <a:ext cx="11035800" cy="1144800"/>
           </a:xfrm>
           <a:prstGeom prst="rect">
             <a:avLst/>
@@ -883,7 +885,7 @@
         <p:spPr>
           <a:xfrm>
             <a:off x="609480" y="1604520"/>
-            <a:ext cx="10972440" cy="3977280"/>
+            <a:ext cx="10972080" cy="3976920"/>
           </a:xfrm>
           <a:prstGeom prst="rect">
             <a:avLst/>
@@ -945,7 +947,7 @@
         <p:spPr>
           <a:xfrm>
             <a:off x="576000" y="2138040"/>
-            <a:ext cx="11036160" cy="1145160"/>
+            <a:ext cx="11035800" cy="1144800"/>
           </a:xfrm>
           <a:prstGeom prst="rect">
             <a:avLst/>
@@ -982,7 +984,7 @@
         <p:spPr>
           <a:xfrm>
             <a:off x="609480" y="1604520"/>
-            <a:ext cx="5354280" cy="3977280"/>
+            <a:ext cx="5354280" cy="3976920"/>
           </a:xfrm>
           <a:prstGeom prst="rect">
             <a:avLst/>
@@ -1022,7 +1024,7 @@
         <p:spPr>
           <a:xfrm>
             <a:off x="6231960" y="1604520"/>
-            <a:ext cx="5354280" cy="3977280"/>
+            <a:ext cx="5354280" cy="3976920"/>
           </a:xfrm>
           <a:prstGeom prst="rect">
             <a:avLst/>
@@ -1084,7 +1086,7 @@
         <p:spPr>
           <a:xfrm>
             <a:off x="576000" y="2138040"/>
-            <a:ext cx="11036160" cy="1145160"/>
+            <a:ext cx="11035800" cy="1144800"/>
           </a:xfrm>
           <a:prstGeom prst="rect">
             <a:avLst/>
@@ -1143,7 +1145,7 @@
         <p:spPr>
           <a:xfrm>
             <a:off x="576000" y="2138040"/>
-            <a:ext cx="11036160" cy="5309640"/>
+            <a:ext cx="11035800" cy="5307840"/>
           </a:xfrm>
           <a:prstGeom prst="rect">
             <a:avLst/>
@@ -1200,7 +1202,7 @@
         <p:spPr>
           <a:xfrm>
             <a:off x="576000" y="2138040"/>
-            <a:ext cx="11036160" cy="1145160"/>
+            <a:ext cx="11035800" cy="1144800"/>
           </a:xfrm>
           <a:prstGeom prst="rect">
             <a:avLst/>
@@ -1277,7 +1279,7 @@
         <p:spPr>
           <a:xfrm>
             <a:off x="6231960" y="1604520"/>
-            <a:ext cx="5354280" cy="3977280"/>
+            <a:ext cx="5354280" cy="3976920"/>
           </a:xfrm>
           <a:prstGeom prst="rect">
             <a:avLst/>
@@ -1379,7 +1381,7 @@
         <p:spPr>
           <a:xfrm>
             <a:off x="576000" y="2138040"/>
-            <a:ext cx="11036160" cy="1145160"/>
+            <a:ext cx="11035800" cy="1144800"/>
           </a:xfrm>
           <a:prstGeom prst="rect">
             <a:avLst/>
@@ -1416,7 +1418,7 @@
         <p:spPr>
           <a:xfrm>
             <a:off x="609480" y="1604520"/>
-            <a:ext cx="10972440" cy="3977280"/>
+            <a:ext cx="10972080" cy="3976920"/>
           </a:xfrm>
           <a:prstGeom prst="rect">
             <a:avLst/>
@@ -1475,7 +1477,7 @@
         <p:spPr>
           <a:xfrm>
             <a:off x="576000" y="2138040"/>
-            <a:ext cx="11036160" cy="1145160"/>
+            <a:ext cx="11035800" cy="1144800"/>
           </a:xfrm>
           <a:prstGeom prst="rect">
             <a:avLst/>
@@ -1512,7 +1514,7 @@
         <p:spPr>
           <a:xfrm>
             <a:off x="609480" y="1604520"/>
-            <a:ext cx="5354280" cy="3977280"/>
+            <a:ext cx="5354280" cy="3976920"/>
           </a:xfrm>
           <a:prstGeom prst="rect">
             <a:avLst/>
@@ -1654,7 +1656,7 @@
         <p:spPr>
           <a:xfrm>
             <a:off x="576000" y="2138040"/>
-            <a:ext cx="11036160" cy="1145160"/>
+            <a:ext cx="11035800" cy="1144800"/>
           </a:xfrm>
           <a:prstGeom prst="rect">
             <a:avLst/>
@@ -1771,7 +1773,7 @@
         <p:spPr>
           <a:xfrm>
             <a:off x="609480" y="3682080"/>
-            <a:ext cx="10972440" cy="1896840"/>
+            <a:ext cx="10972080" cy="1896840"/>
           </a:xfrm>
           <a:prstGeom prst="rect">
             <a:avLst/>
@@ -1833,7 +1835,7 @@
         <p:spPr>
           <a:xfrm>
             <a:off x="576000" y="2138040"/>
-            <a:ext cx="11036160" cy="1145160"/>
+            <a:ext cx="11035800" cy="1144800"/>
           </a:xfrm>
           <a:prstGeom prst="rect">
             <a:avLst/>
@@ -1870,7 +1872,7 @@
         <p:spPr>
           <a:xfrm>
             <a:off x="609480" y="1604520"/>
-            <a:ext cx="10972440" cy="1896840"/>
+            <a:ext cx="10972080" cy="1896840"/>
           </a:xfrm>
           <a:prstGeom prst="rect">
             <a:avLst/>
@@ -1910,7 +1912,7 @@
         <p:spPr>
           <a:xfrm>
             <a:off x="609480" y="3682080"/>
-            <a:ext cx="10972440" cy="1896840"/>
+            <a:ext cx="10972080" cy="1896840"/>
           </a:xfrm>
           <a:prstGeom prst="rect">
             <a:avLst/>
@@ -1972,7 +1974,7 @@
         <p:spPr>
           <a:xfrm>
             <a:off x="576000" y="2138040"/>
-            <a:ext cx="11036160" cy="1145160"/>
+            <a:ext cx="11035800" cy="1144800"/>
           </a:xfrm>
           <a:prstGeom prst="rect">
             <a:avLst/>
@@ -2191,7 +2193,7 @@
         <p:spPr>
           <a:xfrm>
             <a:off x="576000" y="2138040"/>
-            <a:ext cx="11036160" cy="1145160"/>
+            <a:ext cx="11035800" cy="1144800"/>
           </a:xfrm>
           <a:prstGeom prst="rect">
             <a:avLst/>
@@ -2228,7 +2230,7 @@
         <p:spPr>
           <a:xfrm>
             <a:off x="609480" y="1604520"/>
-            <a:ext cx="3533040" cy="1896840"/>
+            <a:ext cx="3532680" cy="1896840"/>
           </a:xfrm>
           <a:prstGeom prst="rect">
             <a:avLst/>
@@ -2267,8 +2269,8 @@
         </p:nvSpPr>
         <p:spPr>
           <a:xfrm>
-            <a:off x="4319640" y="1604520"/>
-            <a:ext cx="3533040" cy="1896840"/>
+            <a:off x="4319280" y="1604520"/>
+            <a:ext cx="3532680" cy="1896840"/>
           </a:xfrm>
           <a:prstGeom prst="rect">
             <a:avLst/>
@@ -2307,8 +2309,8 @@
         </p:nvSpPr>
         <p:spPr>
           <a:xfrm>
-            <a:off x="8029800" y="1604520"/>
-            <a:ext cx="3533040" cy="1896840"/>
+            <a:off x="8028720" y="1604520"/>
+            <a:ext cx="3532680" cy="1896840"/>
           </a:xfrm>
           <a:prstGeom prst="rect">
             <a:avLst/>
@@ -2348,7 +2350,7 @@
         <p:spPr>
           <a:xfrm>
             <a:off x="609480" y="3682080"/>
-            <a:ext cx="3533040" cy="1896840"/>
+            <a:ext cx="3532680" cy="1896840"/>
           </a:xfrm>
           <a:prstGeom prst="rect">
             <a:avLst/>
@@ -2387,8 +2389,8 @@
         </p:nvSpPr>
         <p:spPr>
           <a:xfrm>
-            <a:off x="4319640" y="3682080"/>
-            <a:ext cx="3533040" cy="1896840"/>
+            <a:off x="4319280" y="3682080"/>
+            <a:ext cx="3532680" cy="1896840"/>
           </a:xfrm>
           <a:prstGeom prst="rect">
             <a:avLst/>
@@ -2427,8 +2429,8 @@
         </p:nvSpPr>
         <p:spPr>
           <a:xfrm>
-            <a:off x="8029800" y="3682080"/>
-            <a:ext cx="3533040" cy="1896840"/>
+            <a:off x="8028720" y="3682080"/>
+            <a:ext cx="3532680" cy="1896840"/>
           </a:xfrm>
           <a:prstGeom prst="rect">
             <a:avLst/>
@@ -2450,6 +2452,421 @@
               <a:buNone/>
             </a:pPr>
             <a:endParaRPr b="0" lang="en-GB" sz="3200" spc="-1" strike="noStrike">
+              <a:latin typeface="Arial"/>
+            </a:endParaRPr>
+          </a:p>
+        </p:txBody>
+      </p:sp>
+    </p:spTree>
+  </p:cSld>
+</p:sldLayout>
+</file>
+
+<file path=ppt/slideLayouts/slideLayout25.xml><?xml version="1.0" encoding="utf-8"?>
+<p:sldLayout xmlns:a="http://schemas.openxmlformats.org/drawingml/2006/main" xmlns:p="http://schemas.openxmlformats.org/presentationml/2006/main" xmlns:r="http://schemas.openxmlformats.org/officeDocument/2006/relationships" xmlns:p14="http://schemas.microsoft.com/office/powerpoint/2010/main" xmlns:p15="http://schemas.microsoft.com/office/powerpoint/2012/main" xmlns:mc="http://schemas.openxmlformats.org/markup-compatibility/2006" type="blank" preserve="1">
+  <p:cSld name="Blank Slide">
+    <p:spTree>
+      <p:nvGrpSpPr>
+        <p:cNvPr id="1" name=""/>
+        <p:cNvGrpSpPr/>
+        <p:nvPr/>
+      </p:nvGrpSpPr>
+      <p:grpSpPr>
+        <a:xfrm>
+          <a:off x="0" y="0"/>
+          <a:ext cx="0" cy="0"/>
+          <a:chOff x="0" y="0"/>
+          <a:chExt cx="0" cy="0"/>
+        </a:xfrm>
+      </p:grpSpPr>
+    </p:spTree>
+  </p:cSld>
+</p:sldLayout>
+</file>
+
+<file path=ppt/slideLayouts/slideLayout26.xml><?xml version="1.0" encoding="utf-8"?>
+<p:sldLayout xmlns:a="http://schemas.openxmlformats.org/drawingml/2006/main" xmlns:p="http://schemas.openxmlformats.org/presentationml/2006/main" xmlns:r="http://schemas.openxmlformats.org/officeDocument/2006/relationships" xmlns:p14="http://schemas.microsoft.com/office/powerpoint/2010/main" xmlns:p15="http://schemas.microsoft.com/office/powerpoint/2012/main" xmlns:mc="http://schemas.openxmlformats.org/markup-compatibility/2006" type="tx" preserve="1">
+  <p:cSld name="Title Slide">
+    <p:spTree>
+      <p:nvGrpSpPr>
+        <p:cNvPr id="1" name=""/>
+        <p:cNvGrpSpPr/>
+        <p:nvPr/>
+      </p:nvGrpSpPr>
+      <p:grpSpPr>
+        <a:xfrm>
+          <a:off x="0" y="0"/>
+          <a:ext cx="0" cy="0"/>
+          <a:chOff x="0" y="0"/>
+          <a:chExt cx="0" cy="0"/>
+        </a:xfrm>
+      </p:grpSpPr>
+      <p:sp>
+        <p:nvSpPr>
+          <p:cNvPr id="86" name="PlaceHolder 1"/>
+          <p:cNvSpPr>
+            <a:spLocks noGrp="1"/>
+          </p:cNvSpPr>
+          <p:nvPr>
+            <p:ph type="title"/>
+          </p:nvPr>
+        </p:nvSpPr>
+        <p:spPr>
+          <a:xfrm>
+            <a:off x="576000" y="2138040"/>
+            <a:ext cx="11035800" cy="1144800"/>
+          </a:xfrm>
+          <a:prstGeom prst="rect">
+            <a:avLst/>
+          </a:prstGeom>
+          <a:noFill/>
+          <a:ln w="0">
+            <a:noFill/>
+          </a:ln>
+        </p:spPr>
+        <p:txBody>
+          <a:bodyPr lIns="0" rIns="0" tIns="0" bIns="0" anchor="ctr">
+            <a:noAutofit/>
+          </a:bodyPr>
+          <a:p>
+            <a:pPr indent="0" algn="ctr">
+              <a:buNone/>
+            </a:pPr>
+            <a:endParaRPr b="0" lang="en-GB" sz="4400" spc="-1" strike="noStrike">
+              <a:latin typeface="Arial"/>
+            </a:endParaRPr>
+          </a:p>
+        </p:txBody>
+      </p:sp>
+      <p:sp>
+        <p:nvSpPr>
+          <p:cNvPr id="87" name="PlaceHolder 2"/>
+          <p:cNvSpPr>
+            <a:spLocks noGrp="1"/>
+          </p:cNvSpPr>
+          <p:nvPr>
+            <p:ph type="subTitle"/>
+          </p:nvPr>
+        </p:nvSpPr>
+        <p:spPr>
+          <a:xfrm>
+            <a:off x="609480" y="1604520"/>
+            <a:ext cx="10972080" cy="3976920"/>
+          </a:xfrm>
+          <a:prstGeom prst="rect">
+            <a:avLst/>
+          </a:prstGeom>
+          <a:noFill/>
+          <a:ln w="0">
+            <a:noFill/>
+          </a:ln>
+        </p:spPr>
+        <p:txBody>
+          <a:bodyPr lIns="0" rIns="0" tIns="0" bIns="0" anchor="ctr">
+            <a:noAutofit/>
+          </a:bodyPr>
+          <a:p>
+            <a:pPr indent="0" algn="ctr">
+              <a:buNone/>
+            </a:pPr>
+            <a:endParaRPr b="0" lang="en-GB" sz="3200" spc="-1" strike="noStrike">
+              <a:latin typeface="Arial"/>
+            </a:endParaRPr>
+          </a:p>
+        </p:txBody>
+      </p:sp>
+    </p:spTree>
+  </p:cSld>
+</p:sldLayout>
+</file>
+
+<file path=ppt/slideLayouts/slideLayout27.xml><?xml version="1.0" encoding="utf-8"?>
+<p:sldLayout xmlns:a="http://schemas.openxmlformats.org/drawingml/2006/main" xmlns:p="http://schemas.openxmlformats.org/presentationml/2006/main" xmlns:r="http://schemas.openxmlformats.org/officeDocument/2006/relationships" xmlns:p14="http://schemas.microsoft.com/office/powerpoint/2010/main" xmlns:p15="http://schemas.microsoft.com/office/powerpoint/2012/main" xmlns:mc="http://schemas.openxmlformats.org/markup-compatibility/2006" type="obj" preserve="1">
+  <p:cSld name="Title, Content">
+    <p:spTree>
+      <p:nvGrpSpPr>
+        <p:cNvPr id="1" name=""/>
+        <p:cNvGrpSpPr/>
+        <p:nvPr/>
+      </p:nvGrpSpPr>
+      <p:grpSpPr>
+        <a:xfrm>
+          <a:off x="0" y="0"/>
+          <a:ext cx="0" cy="0"/>
+          <a:chOff x="0" y="0"/>
+          <a:chExt cx="0" cy="0"/>
+        </a:xfrm>
+      </p:grpSpPr>
+      <p:sp>
+        <p:nvSpPr>
+          <p:cNvPr id="88" name="PlaceHolder 1"/>
+          <p:cNvSpPr>
+            <a:spLocks noGrp="1"/>
+          </p:cNvSpPr>
+          <p:nvPr>
+            <p:ph type="title"/>
+          </p:nvPr>
+        </p:nvSpPr>
+        <p:spPr>
+          <a:xfrm>
+            <a:off x="576000" y="2138040"/>
+            <a:ext cx="11035800" cy="1144800"/>
+          </a:xfrm>
+          <a:prstGeom prst="rect">
+            <a:avLst/>
+          </a:prstGeom>
+          <a:noFill/>
+          <a:ln w="0">
+            <a:noFill/>
+          </a:ln>
+        </p:spPr>
+        <p:txBody>
+          <a:bodyPr lIns="0" rIns="0" tIns="0" bIns="0" anchor="ctr">
+            <a:noAutofit/>
+          </a:bodyPr>
+          <a:p>
+            <a:pPr indent="0" algn="ctr">
+              <a:buNone/>
+            </a:pPr>
+            <a:endParaRPr b="0" lang="en-GB" sz="4400" spc="-1" strike="noStrike">
+              <a:latin typeface="Arial"/>
+            </a:endParaRPr>
+          </a:p>
+        </p:txBody>
+      </p:sp>
+      <p:sp>
+        <p:nvSpPr>
+          <p:cNvPr id="89" name="PlaceHolder 2"/>
+          <p:cNvSpPr>
+            <a:spLocks noGrp="1"/>
+          </p:cNvSpPr>
+          <p:nvPr>
+            <p:ph/>
+          </p:nvPr>
+        </p:nvSpPr>
+        <p:spPr>
+          <a:xfrm>
+            <a:off x="609480" y="1604520"/>
+            <a:ext cx="10972080" cy="3976920"/>
+          </a:xfrm>
+          <a:prstGeom prst="rect">
+            <a:avLst/>
+          </a:prstGeom>
+          <a:noFill/>
+          <a:ln w="0">
+            <a:noFill/>
+          </a:ln>
+        </p:spPr>
+        <p:txBody>
+          <a:bodyPr lIns="0" rIns="0" tIns="0" bIns="0" anchor="t">
+            <a:normAutofit/>
+          </a:bodyPr>
+          <a:p>
+            <a:pPr indent="0">
+              <a:spcBef>
+                <a:spcPts val="1417"/>
+              </a:spcBef>
+              <a:buNone/>
+            </a:pPr>
+            <a:endParaRPr b="0" lang="en-GB" sz="3200" spc="-1" strike="noStrike">
+              <a:latin typeface="Arial"/>
+            </a:endParaRPr>
+          </a:p>
+        </p:txBody>
+      </p:sp>
+    </p:spTree>
+  </p:cSld>
+</p:sldLayout>
+</file>
+
+<file path=ppt/slideLayouts/slideLayout28.xml><?xml version="1.0" encoding="utf-8"?>
+<p:sldLayout xmlns:a="http://schemas.openxmlformats.org/drawingml/2006/main" xmlns:p="http://schemas.openxmlformats.org/presentationml/2006/main" xmlns:r="http://schemas.openxmlformats.org/officeDocument/2006/relationships" xmlns:p14="http://schemas.microsoft.com/office/powerpoint/2010/main" xmlns:p15="http://schemas.microsoft.com/office/powerpoint/2012/main" xmlns:mc="http://schemas.openxmlformats.org/markup-compatibility/2006" type="twoObj" preserve="1">
+  <p:cSld name="Title, 2 Content">
+    <p:spTree>
+      <p:nvGrpSpPr>
+        <p:cNvPr id="1" name=""/>
+        <p:cNvGrpSpPr/>
+        <p:nvPr/>
+      </p:nvGrpSpPr>
+      <p:grpSpPr>
+        <a:xfrm>
+          <a:off x="0" y="0"/>
+          <a:ext cx="0" cy="0"/>
+          <a:chOff x="0" y="0"/>
+          <a:chExt cx="0" cy="0"/>
+        </a:xfrm>
+      </p:grpSpPr>
+      <p:sp>
+        <p:nvSpPr>
+          <p:cNvPr id="90" name="PlaceHolder 1"/>
+          <p:cNvSpPr>
+            <a:spLocks noGrp="1"/>
+          </p:cNvSpPr>
+          <p:nvPr>
+            <p:ph type="title"/>
+          </p:nvPr>
+        </p:nvSpPr>
+        <p:spPr>
+          <a:xfrm>
+            <a:off x="576000" y="2138040"/>
+            <a:ext cx="11035800" cy="1144800"/>
+          </a:xfrm>
+          <a:prstGeom prst="rect">
+            <a:avLst/>
+          </a:prstGeom>
+          <a:noFill/>
+          <a:ln w="0">
+            <a:noFill/>
+          </a:ln>
+        </p:spPr>
+        <p:txBody>
+          <a:bodyPr lIns="0" rIns="0" tIns="0" bIns="0" anchor="ctr">
+            <a:noAutofit/>
+          </a:bodyPr>
+          <a:p>
+            <a:pPr indent="0" algn="ctr">
+              <a:buNone/>
+            </a:pPr>
+            <a:endParaRPr b="0" lang="en-GB" sz="4400" spc="-1" strike="noStrike">
+              <a:latin typeface="Arial"/>
+            </a:endParaRPr>
+          </a:p>
+        </p:txBody>
+      </p:sp>
+      <p:sp>
+        <p:nvSpPr>
+          <p:cNvPr id="91" name="PlaceHolder 2"/>
+          <p:cNvSpPr>
+            <a:spLocks noGrp="1"/>
+          </p:cNvSpPr>
+          <p:nvPr>
+            <p:ph/>
+          </p:nvPr>
+        </p:nvSpPr>
+        <p:spPr>
+          <a:xfrm>
+            <a:off x="609480" y="1604520"/>
+            <a:ext cx="5354280" cy="3976920"/>
+          </a:xfrm>
+          <a:prstGeom prst="rect">
+            <a:avLst/>
+          </a:prstGeom>
+          <a:noFill/>
+          <a:ln w="0">
+            <a:noFill/>
+          </a:ln>
+        </p:spPr>
+        <p:txBody>
+          <a:bodyPr lIns="0" rIns="0" tIns="0" bIns="0" anchor="t">
+            <a:normAutofit/>
+          </a:bodyPr>
+          <a:p>
+            <a:pPr indent="0">
+              <a:spcBef>
+                <a:spcPts val="1417"/>
+              </a:spcBef>
+              <a:buNone/>
+            </a:pPr>
+            <a:endParaRPr b="0" lang="en-GB" sz="3200" spc="-1" strike="noStrike">
+              <a:latin typeface="Arial"/>
+            </a:endParaRPr>
+          </a:p>
+        </p:txBody>
+      </p:sp>
+      <p:sp>
+        <p:nvSpPr>
+          <p:cNvPr id="92" name="PlaceHolder 3"/>
+          <p:cNvSpPr>
+            <a:spLocks noGrp="1"/>
+          </p:cNvSpPr>
+          <p:nvPr>
+            <p:ph/>
+          </p:nvPr>
+        </p:nvSpPr>
+        <p:spPr>
+          <a:xfrm>
+            <a:off x="6231960" y="1604520"/>
+            <a:ext cx="5354280" cy="3976920"/>
+          </a:xfrm>
+          <a:prstGeom prst="rect">
+            <a:avLst/>
+          </a:prstGeom>
+          <a:noFill/>
+          <a:ln w="0">
+            <a:noFill/>
+          </a:ln>
+        </p:spPr>
+        <p:txBody>
+          <a:bodyPr lIns="0" rIns="0" tIns="0" bIns="0" anchor="t">
+            <a:normAutofit/>
+          </a:bodyPr>
+          <a:p>
+            <a:pPr indent="0">
+              <a:spcBef>
+                <a:spcPts val="1417"/>
+              </a:spcBef>
+              <a:buNone/>
+            </a:pPr>
+            <a:endParaRPr b="0" lang="en-GB" sz="3200" spc="-1" strike="noStrike">
+              <a:latin typeface="Arial"/>
+            </a:endParaRPr>
+          </a:p>
+        </p:txBody>
+      </p:sp>
+    </p:spTree>
+  </p:cSld>
+</p:sldLayout>
+</file>
+
+<file path=ppt/slideLayouts/slideLayout29.xml><?xml version="1.0" encoding="utf-8"?>
+<p:sldLayout xmlns:a="http://schemas.openxmlformats.org/drawingml/2006/main" xmlns:p="http://schemas.openxmlformats.org/presentationml/2006/main" xmlns:r="http://schemas.openxmlformats.org/officeDocument/2006/relationships" xmlns:p14="http://schemas.microsoft.com/office/powerpoint/2010/main" xmlns:p15="http://schemas.microsoft.com/office/powerpoint/2012/main" xmlns:mc="http://schemas.openxmlformats.org/markup-compatibility/2006" type="titleOnly" preserve="1">
+  <p:cSld name="Title Only">
+    <p:spTree>
+      <p:nvGrpSpPr>
+        <p:cNvPr id="1" name=""/>
+        <p:cNvGrpSpPr/>
+        <p:nvPr/>
+      </p:nvGrpSpPr>
+      <p:grpSpPr>
+        <a:xfrm>
+          <a:off x="0" y="0"/>
+          <a:ext cx="0" cy="0"/>
+          <a:chOff x="0" y="0"/>
+          <a:chExt cx="0" cy="0"/>
+        </a:xfrm>
+      </p:grpSpPr>
+      <p:sp>
+        <p:nvSpPr>
+          <p:cNvPr id="93" name="PlaceHolder 1"/>
+          <p:cNvSpPr>
+            <a:spLocks noGrp="1"/>
+          </p:cNvSpPr>
+          <p:nvPr>
+            <p:ph type="title"/>
+          </p:nvPr>
+        </p:nvSpPr>
+        <p:spPr>
+          <a:xfrm>
+            <a:off x="576000" y="2138040"/>
+            <a:ext cx="11035800" cy="1144800"/>
+          </a:xfrm>
+          <a:prstGeom prst="rect">
+            <a:avLst/>
+          </a:prstGeom>
+          <a:noFill/>
+          <a:ln w="0">
+            <a:noFill/>
+          </a:ln>
+        </p:spPr>
+        <p:txBody>
+          <a:bodyPr lIns="0" rIns="0" tIns="0" bIns="0" anchor="ctr">
+            <a:noAutofit/>
+          </a:bodyPr>
+          <a:p>
+            <a:pPr indent="0" algn="ctr">
+              <a:buNone/>
+            </a:pPr>
+            <a:endParaRPr b="0" lang="en-GB" sz="4400" spc="-1" strike="noStrike">
               <a:latin typeface="Arial"/>
             </a:endParaRPr>
           </a:p>
@@ -2490,7 +2907,7 @@
         <p:spPr>
           <a:xfrm>
             <a:off x="576000" y="2138040"/>
-            <a:ext cx="11036160" cy="1145160"/>
+            <a:ext cx="11035800" cy="1144800"/>
           </a:xfrm>
           <a:prstGeom prst="rect">
             <a:avLst/>
@@ -2527,7 +2944,1258 @@
         <p:spPr>
           <a:xfrm>
             <a:off x="609480" y="1604520"/>
-            <a:ext cx="10972440" cy="3977280"/>
+            <a:ext cx="10972080" cy="3976920"/>
+          </a:xfrm>
+          <a:prstGeom prst="rect">
+            <a:avLst/>
+          </a:prstGeom>
+          <a:noFill/>
+          <a:ln w="0">
+            <a:noFill/>
+          </a:ln>
+        </p:spPr>
+        <p:txBody>
+          <a:bodyPr lIns="0" rIns="0" tIns="0" bIns="0" anchor="t">
+            <a:normAutofit/>
+          </a:bodyPr>
+          <a:p>
+            <a:pPr indent="0">
+              <a:spcBef>
+                <a:spcPts val="1417"/>
+              </a:spcBef>
+              <a:buNone/>
+            </a:pPr>
+            <a:endParaRPr b="0" lang="en-GB" sz="3200" spc="-1" strike="noStrike">
+              <a:latin typeface="Arial"/>
+            </a:endParaRPr>
+          </a:p>
+        </p:txBody>
+      </p:sp>
+    </p:spTree>
+  </p:cSld>
+</p:sldLayout>
+</file>
+
+<file path=ppt/slideLayouts/slideLayout30.xml><?xml version="1.0" encoding="utf-8"?>
+<p:sldLayout xmlns:a="http://schemas.openxmlformats.org/drawingml/2006/main" xmlns:p="http://schemas.openxmlformats.org/presentationml/2006/main" xmlns:r="http://schemas.openxmlformats.org/officeDocument/2006/relationships" xmlns:p14="http://schemas.microsoft.com/office/powerpoint/2010/main" xmlns:p15="http://schemas.microsoft.com/office/powerpoint/2012/main" xmlns:mc="http://schemas.openxmlformats.org/markup-compatibility/2006" type="objOnly" preserve="1">
+  <p:cSld name="Centered Text">
+    <p:spTree>
+      <p:nvGrpSpPr>
+        <p:cNvPr id="1" name=""/>
+        <p:cNvGrpSpPr/>
+        <p:nvPr/>
+      </p:nvGrpSpPr>
+      <p:grpSpPr>
+        <a:xfrm>
+          <a:off x="0" y="0"/>
+          <a:ext cx="0" cy="0"/>
+          <a:chOff x="0" y="0"/>
+          <a:chExt cx="0" cy="0"/>
+        </a:xfrm>
+      </p:grpSpPr>
+      <p:sp>
+        <p:nvSpPr>
+          <p:cNvPr id="94" name="PlaceHolder 1"/>
+          <p:cNvSpPr>
+            <a:spLocks noGrp="1"/>
+          </p:cNvSpPr>
+          <p:nvPr>
+            <p:ph type="subTitle"/>
+          </p:nvPr>
+        </p:nvSpPr>
+        <p:spPr>
+          <a:xfrm>
+            <a:off x="576000" y="2138040"/>
+            <a:ext cx="11035800" cy="5307840"/>
+          </a:xfrm>
+          <a:prstGeom prst="rect">
+            <a:avLst/>
+          </a:prstGeom>
+          <a:noFill/>
+          <a:ln w="0">
+            <a:noFill/>
+          </a:ln>
+        </p:spPr>
+        <p:txBody>
+          <a:bodyPr lIns="0" rIns="0" tIns="0" bIns="0" anchor="ctr">
+            <a:noAutofit/>
+          </a:bodyPr>
+          <a:p>
+            <a:pPr algn="ctr"/>
+            <a:endParaRPr b="0" lang="en-GB" sz="3200" spc="-1" strike="noStrike">
+              <a:latin typeface="Arial"/>
+            </a:endParaRPr>
+          </a:p>
+        </p:txBody>
+      </p:sp>
+    </p:spTree>
+  </p:cSld>
+</p:sldLayout>
+</file>
+
+<file path=ppt/slideLayouts/slideLayout31.xml><?xml version="1.0" encoding="utf-8"?>
+<p:sldLayout xmlns:a="http://schemas.openxmlformats.org/drawingml/2006/main" xmlns:p="http://schemas.openxmlformats.org/presentationml/2006/main" xmlns:r="http://schemas.openxmlformats.org/officeDocument/2006/relationships" xmlns:p14="http://schemas.microsoft.com/office/powerpoint/2010/main" xmlns:p15="http://schemas.microsoft.com/office/powerpoint/2012/main" xmlns:mc="http://schemas.openxmlformats.org/markup-compatibility/2006" type="twoObjAndObj" preserve="1">
+  <p:cSld name="Title, 2 Content and Content">
+    <p:spTree>
+      <p:nvGrpSpPr>
+        <p:cNvPr id="1" name=""/>
+        <p:cNvGrpSpPr/>
+        <p:nvPr/>
+      </p:nvGrpSpPr>
+      <p:grpSpPr>
+        <a:xfrm>
+          <a:off x="0" y="0"/>
+          <a:ext cx="0" cy="0"/>
+          <a:chOff x="0" y="0"/>
+          <a:chExt cx="0" cy="0"/>
+        </a:xfrm>
+      </p:grpSpPr>
+      <p:sp>
+        <p:nvSpPr>
+          <p:cNvPr id="95" name="PlaceHolder 1"/>
+          <p:cNvSpPr>
+            <a:spLocks noGrp="1"/>
+          </p:cNvSpPr>
+          <p:nvPr>
+            <p:ph type="title"/>
+          </p:nvPr>
+        </p:nvSpPr>
+        <p:spPr>
+          <a:xfrm>
+            <a:off x="576000" y="2138040"/>
+            <a:ext cx="11035800" cy="1144800"/>
+          </a:xfrm>
+          <a:prstGeom prst="rect">
+            <a:avLst/>
+          </a:prstGeom>
+          <a:noFill/>
+          <a:ln w="0">
+            <a:noFill/>
+          </a:ln>
+        </p:spPr>
+        <p:txBody>
+          <a:bodyPr lIns="0" rIns="0" tIns="0" bIns="0" anchor="ctr">
+            <a:noAutofit/>
+          </a:bodyPr>
+          <a:p>
+            <a:pPr indent="0" algn="ctr">
+              <a:buNone/>
+            </a:pPr>
+            <a:endParaRPr b="0" lang="en-GB" sz="4400" spc="-1" strike="noStrike">
+              <a:latin typeface="Arial"/>
+            </a:endParaRPr>
+          </a:p>
+        </p:txBody>
+      </p:sp>
+      <p:sp>
+        <p:nvSpPr>
+          <p:cNvPr id="96" name="PlaceHolder 2"/>
+          <p:cNvSpPr>
+            <a:spLocks noGrp="1"/>
+          </p:cNvSpPr>
+          <p:nvPr>
+            <p:ph/>
+          </p:nvPr>
+        </p:nvSpPr>
+        <p:spPr>
+          <a:xfrm>
+            <a:off x="609480" y="1604520"/>
+            <a:ext cx="5354280" cy="1896840"/>
+          </a:xfrm>
+          <a:prstGeom prst="rect">
+            <a:avLst/>
+          </a:prstGeom>
+          <a:noFill/>
+          <a:ln w="0">
+            <a:noFill/>
+          </a:ln>
+        </p:spPr>
+        <p:txBody>
+          <a:bodyPr lIns="0" rIns="0" tIns="0" bIns="0" anchor="t">
+            <a:normAutofit/>
+          </a:bodyPr>
+          <a:p>
+            <a:pPr indent="0">
+              <a:spcBef>
+                <a:spcPts val="1417"/>
+              </a:spcBef>
+              <a:buNone/>
+            </a:pPr>
+            <a:endParaRPr b="0" lang="en-GB" sz="3200" spc="-1" strike="noStrike">
+              <a:latin typeface="Arial"/>
+            </a:endParaRPr>
+          </a:p>
+        </p:txBody>
+      </p:sp>
+      <p:sp>
+        <p:nvSpPr>
+          <p:cNvPr id="97" name="PlaceHolder 3"/>
+          <p:cNvSpPr>
+            <a:spLocks noGrp="1"/>
+          </p:cNvSpPr>
+          <p:nvPr>
+            <p:ph/>
+          </p:nvPr>
+        </p:nvSpPr>
+        <p:spPr>
+          <a:xfrm>
+            <a:off x="6231960" y="1604520"/>
+            <a:ext cx="5354280" cy="3976920"/>
+          </a:xfrm>
+          <a:prstGeom prst="rect">
+            <a:avLst/>
+          </a:prstGeom>
+          <a:noFill/>
+          <a:ln w="0">
+            <a:noFill/>
+          </a:ln>
+        </p:spPr>
+        <p:txBody>
+          <a:bodyPr lIns="0" rIns="0" tIns="0" bIns="0" anchor="t">
+            <a:normAutofit/>
+          </a:bodyPr>
+          <a:p>
+            <a:pPr indent="0">
+              <a:spcBef>
+                <a:spcPts val="1417"/>
+              </a:spcBef>
+              <a:buNone/>
+            </a:pPr>
+            <a:endParaRPr b="0" lang="en-GB" sz="3200" spc="-1" strike="noStrike">
+              <a:latin typeface="Arial"/>
+            </a:endParaRPr>
+          </a:p>
+        </p:txBody>
+      </p:sp>
+      <p:sp>
+        <p:nvSpPr>
+          <p:cNvPr id="98" name="PlaceHolder 4"/>
+          <p:cNvSpPr>
+            <a:spLocks noGrp="1"/>
+          </p:cNvSpPr>
+          <p:nvPr>
+            <p:ph/>
+          </p:nvPr>
+        </p:nvSpPr>
+        <p:spPr>
+          <a:xfrm>
+            <a:off x="609480" y="3682080"/>
+            <a:ext cx="5354280" cy="1896840"/>
+          </a:xfrm>
+          <a:prstGeom prst="rect">
+            <a:avLst/>
+          </a:prstGeom>
+          <a:noFill/>
+          <a:ln w="0">
+            <a:noFill/>
+          </a:ln>
+        </p:spPr>
+        <p:txBody>
+          <a:bodyPr lIns="0" rIns="0" tIns="0" bIns="0" anchor="t">
+            <a:normAutofit/>
+          </a:bodyPr>
+          <a:p>
+            <a:pPr indent="0">
+              <a:spcBef>
+                <a:spcPts val="1417"/>
+              </a:spcBef>
+              <a:buNone/>
+            </a:pPr>
+            <a:endParaRPr b="0" lang="en-GB" sz="3200" spc="-1" strike="noStrike">
+              <a:latin typeface="Arial"/>
+            </a:endParaRPr>
+          </a:p>
+        </p:txBody>
+      </p:sp>
+    </p:spTree>
+  </p:cSld>
+</p:sldLayout>
+</file>
+
+<file path=ppt/slideLayouts/slideLayout32.xml><?xml version="1.0" encoding="utf-8"?>
+<p:sldLayout xmlns:a="http://schemas.openxmlformats.org/drawingml/2006/main" xmlns:p="http://schemas.openxmlformats.org/presentationml/2006/main" xmlns:r="http://schemas.openxmlformats.org/officeDocument/2006/relationships" xmlns:p14="http://schemas.microsoft.com/office/powerpoint/2010/main" xmlns:p15="http://schemas.microsoft.com/office/powerpoint/2012/main" xmlns:mc="http://schemas.openxmlformats.org/markup-compatibility/2006" type="objAndTwoObj" preserve="1">
+  <p:cSld name="Title Content and 2 Content">
+    <p:spTree>
+      <p:nvGrpSpPr>
+        <p:cNvPr id="1" name=""/>
+        <p:cNvGrpSpPr/>
+        <p:nvPr/>
+      </p:nvGrpSpPr>
+      <p:grpSpPr>
+        <a:xfrm>
+          <a:off x="0" y="0"/>
+          <a:ext cx="0" cy="0"/>
+          <a:chOff x="0" y="0"/>
+          <a:chExt cx="0" cy="0"/>
+        </a:xfrm>
+      </p:grpSpPr>
+      <p:sp>
+        <p:nvSpPr>
+          <p:cNvPr id="99" name="PlaceHolder 1"/>
+          <p:cNvSpPr>
+            <a:spLocks noGrp="1"/>
+          </p:cNvSpPr>
+          <p:nvPr>
+            <p:ph type="title"/>
+          </p:nvPr>
+        </p:nvSpPr>
+        <p:spPr>
+          <a:xfrm>
+            <a:off x="576000" y="2138040"/>
+            <a:ext cx="11035800" cy="1144800"/>
+          </a:xfrm>
+          <a:prstGeom prst="rect">
+            <a:avLst/>
+          </a:prstGeom>
+          <a:noFill/>
+          <a:ln w="0">
+            <a:noFill/>
+          </a:ln>
+        </p:spPr>
+        <p:txBody>
+          <a:bodyPr lIns="0" rIns="0" tIns="0" bIns="0" anchor="ctr">
+            <a:noAutofit/>
+          </a:bodyPr>
+          <a:p>
+            <a:pPr indent="0" algn="ctr">
+              <a:buNone/>
+            </a:pPr>
+            <a:endParaRPr b="0" lang="en-GB" sz="4400" spc="-1" strike="noStrike">
+              <a:latin typeface="Arial"/>
+            </a:endParaRPr>
+          </a:p>
+        </p:txBody>
+      </p:sp>
+      <p:sp>
+        <p:nvSpPr>
+          <p:cNvPr id="100" name="PlaceHolder 2"/>
+          <p:cNvSpPr>
+            <a:spLocks noGrp="1"/>
+          </p:cNvSpPr>
+          <p:nvPr>
+            <p:ph/>
+          </p:nvPr>
+        </p:nvSpPr>
+        <p:spPr>
+          <a:xfrm>
+            <a:off x="609480" y="1604520"/>
+            <a:ext cx="5354280" cy="3976920"/>
+          </a:xfrm>
+          <a:prstGeom prst="rect">
+            <a:avLst/>
+          </a:prstGeom>
+          <a:noFill/>
+          <a:ln w="0">
+            <a:noFill/>
+          </a:ln>
+        </p:spPr>
+        <p:txBody>
+          <a:bodyPr lIns="0" rIns="0" tIns="0" bIns="0" anchor="t">
+            <a:normAutofit/>
+          </a:bodyPr>
+          <a:p>
+            <a:pPr indent="0">
+              <a:spcBef>
+                <a:spcPts val="1417"/>
+              </a:spcBef>
+              <a:buNone/>
+            </a:pPr>
+            <a:endParaRPr b="0" lang="en-GB" sz="3200" spc="-1" strike="noStrike">
+              <a:latin typeface="Arial"/>
+            </a:endParaRPr>
+          </a:p>
+        </p:txBody>
+      </p:sp>
+      <p:sp>
+        <p:nvSpPr>
+          <p:cNvPr id="101" name="PlaceHolder 3"/>
+          <p:cNvSpPr>
+            <a:spLocks noGrp="1"/>
+          </p:cNvSpPr>
+          <p:nvPr>
+            <p:ph/>
+          </p:nvPr>
+        </p:nvSpPr>
+        <p:spPr>
+          <a:xfrm>
+            <a:off x="6231960" y="1604520"/>
+            <a:ext cx="5354280" cy="1896840"/>
+          </a:xfrm>
+          <a:prstGeom prst="rect">
+            <a:avLst/>
+          </a:prstGeom>
+          <a:noFill/>
+          <a:ln w="0">
+            <a:noFill/>
+          </a:ln>
+        </p:spPr>
+        <p:txBody>
+          <a:bodyPr lIns="0" rIns="0" tIns="0" bIns="0" anchor="t">
+            <a:normAutofit/>
+          </a:bodyPr>
+          <a:p>
+            <a:pPr indent="0">
+              <a:spcBef>
+                <a:spcPts val="1417"/>
+              </a:spcBef>
+              <a:buNone/>
+            </a:pPr>
+            <a:endParaRPr b="0" lang="en-GB" sz="3200" spc="-1" strike="noStrike">
+              <a:latin typeface="Arial"/>
+            </a:endParaRPr>
+          </a:p>
+        </p:txBody>
+      </p:sp>
+      <p:sp>
+        <p:nvSpPr>
+          <p:cNvPr id="102" name="PlaceHolder 4"/>
+          <p:cNvSpPr>
+            <a:spLocks noGrp="1"/>
+          </p:cNvSpPr>
+          <p:nvPr>
+            <p:ph/>
+          </p:nvPr>
+        </p:nvSpPr>
+        <p:spPr>
+          <a:xfrm>
+            <a:off x="6231960" y="3682080"/>
+            <a:ext cx="5354280" cy="1896840"/>
+          </a:xfrm>
+          <a:prstGeom prst="rect">
+            <a:avLst/>
+          </a:prstGeom>
+          <a:noFill/>
+          <a:ln w="0">
+            <a:noFill/>
+          </a:ln>
+        </p:spPr>
+        <p:txBody>
+          <a:bodyPr lIns="0" rIns="0" tIns="0" bIns="0" anchor="t">
+            <a:normAutofit/>
+          </a:bodyPr>
+          <a:p>
+            <a:pPr indent="0">
+              <a:spcBef>
+                <a:spcPts val="1417"/>
+              </a:spcBef>
+              <a:buNone/>
+            </a:pPr>
+            <a:endParaRPr b="0" lang="en-GB" sz="3200" spc="-1" strike="noStrike">
+              <a:latin typeface="Arial"/>
+            </a:endParaRPr>
+          </a:p>
+        </p:txBody>
+      </p:sp>
+    </p:spTree>
+  </p:cSld>
+</p:sldLayout>
+</file>
+
+<file path=ppt/slideLayouts/slideLayout33.xml><?xml version="1.0" encoding="utf-8"?>
+<p:sldLayout xmlns:a="http://schemas.openxmlformats.org/drawingml/2006/main" xmlns:p="http://schemas.openxmlformats.org/presentationml/2006/main" xmlns:r="http://schemas.openxmlformats.org/officeDocument/2006/relationships" xmlns:p14="http://schemas.microsoft.com/office/powerpoint/2010/main" xmlns:p15="http://schemas.microsoft.com/office/powerpoint/2012/main" xmlns:mc="http://schemas.openxmlformats.org/markup-compatibility/2006" type="twoObjOverTx" preserve="1">
+  <p:cSld name="Title, 2 Content over Content">
+    <p:spTree>
+      <p:nvGrpSpPr>
+        <p:cNvPr id="1" name=""/>
+        <p:cNvGrpSpPr/>
+        <p:nvPr/>
+      </p:nvGrpSpPr>
+      <p:grpSpPr>
+        <a:xfrm>
+          <a:off x="0" y="0"/>
+          <a:ext cx="0" cy="0"/>
+          <a:chOff x="0" y="0"/>
+          <a:chExt cx="0" cy="0"/>
+        </a:xfrm>
+      </p:grpSpPr>
+      <p:sp>
+        <p:nvSpPr>
+          <p:cNvPr id="103" name="PlaceHolder 1"/>
+          <p:cNvSpPr>
+            <a:spLocks noGrp="1"/>
+          </p:cNvSpPr>
+          <p:nvPr>
+            <p:ph type="title"/>
+          </p:nvPr>
+        </p:nvSpPr>
+        <p:spPr>
+          <a:xfrm>
+            <a:off x="576000" y="2138040"/>
+            <a:ext cx="11035800" cy="1144800"/>
+          </a:xfrm>
+          <a:prstGeom prst="rect">
+            <a:avLst/>
+          </a:prstGeom>
+          <a:noFill/>
+          <a:ln w="0">
+            <a:noFill/>
+          </a:ln>
+        </p:spPr>
+        <p:txBody>
+          <a:bodyPr lIns="0" rIns="0" tIns="0" bIns="0" anchor="ctr">
+            <a:noAutofit/>
+          </a:bodyPr>
+          <a:p>
+            <a:pPr indent="0" algn="ctr">
+              <a:buNone/>
+            </a:pPr>
+            <a:endParaRPr b="0" lang="en-GB" sz="4400" spc="-1" strike="noStrike">
+              <a:latin typeface="Arial"/>
+            </a:endParaRPr>
+          </a:p>
+        </p:txBody>
+      </p:sp>
+      <p:sp>
+        <p:nvSpPr>
+          <p:cNvPr id="104" name="PlaceHolder 2"/>
+          <p:cNvSpPr>
+            <a:spLocks noGrp="1"/>
+          </p:cNvSpPr>
+          <p:nvPr>
+            <p:ph/>
+          </p:nvPr>
+        </p:nvSpPr>
+        <p:spPr>
+          <a:xfrm>
+            <a:off x="609480" y="1604520"/>
+            <a:ext cx="5354280" cy="1896840"/>
+          </a:xfrm>
+          <a:prstGeom prst="rect">
+            <a:avLst/>
+          </a:prstGeom>
+          <a:noFill/>
+          <a:ln w="0">
+            <a:noFill/>
+          </a:ln>
+        </p:spPr>
+        <p:txBody>
+          <a:bodyPr lIns="0" rIns="0" tIns="0" bIns="0" anchor="t">
+            <a:normAutofit/>
+          </a:bodyPr>
+          <a:p>
+            <a:pPr indent="0">
+              <a:spcBef>
+                <a:spcPts val="1417"/>
+              </a:spcBef>
+              <a:buNone/>
+            </a:pPr>
+            <a:endParaRPr b="0" lang="en-GB" sz="3200" spc="-1" strike="noStrike">
+              <a:latin typeface="Arial"/>
+            </a:endParaRPr>
+          </a:p>
+        </p:txBody>
+      </p:sp>
+      <p:sp>
+        <p:nvSpPr>
+          <p:cNvPr id="105" name="PlaceHolder 3"/>
+          <p:cNvSpPr>
+            <a:spLocks noGrp="1"/>
+          </p:cNvSpPr>
+          <p:nvPr>
+            <p:ph/>
+          </p:nvPr>
+        </p:nvSpPr>
+        <p:spPr>
+          <a:xfrm>
+            <a:off x="6231960" y="1604520"/>
+            <a:ext cx="5354280" cy="1896840"/>
+          </a:xfrm>
+          <a:prstGeom prst="rect">
+            <a:avLst/>
+          </a:prstGeom>
+          <a:noFill/>
+          <a:ln w="0">
+            <a:noFill/>
+          </a:ln>
+        </p:spPr>
+        <p:txBody>
+          <a:bodyPr lIns="0" rIns="0" tIns="0" bIns="0" anchor="t">
+            <a:normAutofit/>
+          </a:bodyPr>
+          <a:p>
+            <a:pPr indent="0">
+              <a:spcBef>
+                <a:spcPts val="1417"/>
+              </a:spcBef>
+              <a:buNone/>
+            </a:pPr>
+            <a:endParaRPr b="0" lang="en-GB" sz="3200" spc="-1" strike="noStrike">
+              <a:latin typeface="Arial"/>
+            </a:endParaRPr>
+          </a:p>
+        </p:txBody>
+      </p:sp>
+      <p:sp>
+        <p:nvSpPr>
+          <p:cNvPr id="106" name="PlaceHolder 4"/>
+          <p:cNvSpPr>
+            <a:spLocks noGrp="1"/>
+          </p:cNvSpPr>
+          <p:nvPr>
+            <p:ph/>
+          </p:nvPr>
+        </p:nvSpPr>
+        <p:spPr>
+          <a:xfrm>
+            <a:off x="609480" y="3682080"/>
+            <a:ext cx="10972080" cy="1896840"/>
+          </a:xfrm>
+          <a:prstGeom prst="rect">
+            <a:avLst/>
+          </a:prstGeom>
+          <a:noFill/>
+          <a:ln w="0">
+            <a:noFill/>
+          </a:ln>
+        </p:spPr>
+        <p:txBody>
+          <a:bodyPr lIns="0" rIns="0" tIns="0" bIns="0" anchor="t">
+            <a:normAutofit/>
+          </a:bodyPr>
+          <a:p>
+            <a:pPr indent="0">
+              <a:spcBef>
+                <a:spcPts val="1417"/>
+              </a:spcBef>
+              <a:buNone/>
+            </a:pPr>
+            <a:endParaRPr b="0" lang="en-GB" sz="3200" spc="-1" strike="noStrike">
+              <a:latin typeface="Arial"/>
+            </a:endParaRPr>
+          </a:p>
+        </p:txBody>
+      </p:sp>
+    </p:spTree>
+  </p:cSld>
+</p:sldLayout>
+</file>
+
+<file path=ppt/slideLayouts/slideLayout34.xml><?xml version="1.0" encoding="utf-8"?>
+<p:sldLayout xmlns:a="http://schemas.openxmlformats.org/drawingml/2006/main" xmlns:p="http://schemas.openxmlformats.org/presentationml/2006/main" xmlns:r="http://schemas.openxmlformats.org/officeDocument/2006/relationships" xmlns:p14="http://schemas.microsoft.com/office/powerpoint/2010/main" xmlns:p15="http://schemas.microsoft.com/office/powerpoint/2012/main" xmlns:mc="http://schemas.openxmlformats.org/markup-compatibility/2006" type="objOverTx" preserve="1">
+  <p:cSld name="Title, Content over Content">
+    <p:spTree>
+      <p:nvGrpSpPr>
+        <p:cNvPr id="1" name=""/>
+        <p:cNvGrpSpPr/>
+        <p:nvPr/>
+      </p:nvGrpSpPr>
+      <p:grpSpPr>
+        <a:xfrm>
+          <a:off x="0" y="0"/>
+          <a:ext cx="0" cy="0"/>
+          <a:chOff x="0" y="0"/>
+          <a:chExt cx="0" cy="0"/>
+        </a:xfrm>
+      </p:grpSpPr>
+      <p:sp>
+        <p:nvSpPr>
+          <p:cNvPr id="107" name="PlaceHolder 1"/>
+          <p:cNvSpPr>
+            <a:spLocks noGrp="1"/>
+          </p:cNvSpPr>
+          <p:nvPr>
+            <p:ph type="title"/>
+          </p:nvPr>
+        </p:nvSpPr>
+        <p:spPr>
+          <a:xfrm>
+            <a:off x="576000" y="2138040"/>
+            <a:ext cx="11035800" cy="1144800"/>
+          </a:xfrm>
+          <a:prstGeom prst="rect">
+            <a:avLst/>
+          </a:prstGeom>
+          <a:noFill/>
+          <a:ln w="0">
+            <a:noFill/>
+          </a:ln>
+        </p:spPr>
+        <p:txBody>
+          <a:bodyPr lIns="0" rIns="0" tIns="0" bIns="0" anchor="ctr">
+            <a:noAutofit/>
+          </a:bodyPr>
+          <a:p>
+            <a:pPr indent="0" algn="ctr">
+              <a:buNone/>
+            </a:pPr>
+            <a:endParaRPr b="0" lang="en-GB" sz="4400" spc="-1" strike="noStrike">
+              <a:latin typeface="Arial"/>
+            </a:endParaRPr>
+          </a:p>
+        </p:txBody>
+      </p:sp>
+      <p:sp>
+        <p:nvSpPr>
+          <p:cNvPr id="108" name="PlaceHolder 2"/>
+          <p:cNvSpPr>
+            <a:spLocks noGrp="1"/>
+          </p:cNvSpPr>
+          <p:nvPr>
+            <p:ph/>
+          </p:nvPr>
+        </p:nvSpPr>
+        <p:spPr>
+          <a:xfrm>
+            <a:off x="609480" y="1604520"/>
+            <a:ext cx="10972080" cy="1896840"/>
+          </a:xfrm>
+          <a:prstGeom prst="rect">
+            <a:avLst/>
+          </a:prstGeom>
+          <a:noFill/>
+          <a:ln w="0">
+            <a:noFill/>
+          </a:ln>
+        </p:spPr>
+        <p:txBody>
+          <a:bodyPr lIns="0" rIns="0" tIns="0" bIns="0" anchor="t">
+            <a:normAutofit/>
+          </a:bodyPr>
+          <a:p>
+            <a:pPr indent="0">
+              <a:spcBef>
+                <a:spcPts val="1417"/>
+              </a:spcBef>
+              <a:buNone/>
+            </a:pPr>
+            <a:endParaRPr b="0" lang="en-GB" sz="3200" spc="-1" strike="noStrike">
+              <a:latin typeface="Arial"/>
+            </a:endParaRPr>
+          </a:p>
+        </p:txBody>
+      </p:sp>
+      <p:sp>
+        <p:nvSpPr>
+          <p:cNvPr id="109" name="PlaceHolder 3"/>
+          <p:cNvSpPr>
+            <a:spLocks noGrp="1"/>
+          </p:cNvSpPr>
+          <p:nvPr>
+            <p:ph/>
+          </p:nvPr>
+        </p:nvSpPr>
+        <p:spPr>
+          <a:xfrm>
+            <a:off x="609480" y="3682080"/>
+            <a:ext cx="10972080" cy="1896840"/>
+          </a:xfrm>
+          <a:prstGeom prst="rect">
+            <a:avLst/>
+          </a:prstGeom>
+          <a:noFill/>
+          <a:ln w="0">
+            <a:noFill/>
+          </a:ln>
+        </p:spPr>
+        <p:txBody>
+          <a:bodyPr lIns="0" rIns="0" tIns="0" bIns="0" anchor="t">
+            <a:normAutofit/>
+          </a:bodyPr>
+          <a:p>
+            <a:pPr indent="0">
+              <a:spcBef>
+                <a:spcPts val="1417"/>
+              </a:spcBef>
+              <a:buNone/>
+            </a:pPr>
+            <a:endParaRPr b="0" lang="en-GB" sz="3200" spc="-1" strike="noStrike">
+              <a:latin typeface="Arial"/>
+            </a:endParaRPr>
+          </a:p>
+        </p:txBody>
+      </p:sp>
+    </p:spTree>
+  </p:cSld>
+</p:sldLayout>
+</file>
+
+<file path=ppt/slideLayouts/slideLayout35.xml><?xml version="1.0" encoding="utf-8"?>
+<p:sldLayout xmlns:a="http://schemas.openxmlformats.org/drawingml/2006/main" xmlns:p="http://schemas.openxmlformats.org/presentationml/2006/main" xmlns:r="http://schemas.openxmlformats.org/officeDocument/2006/relationships" xmlns:p14="http://schemas.microsoft.com/office/powerpoint/2010/main" xmlns:p15="http://schemas.microsoft.com/office/powerpoint/2012/main" xmlns:mc="http://schemas.openxmlformats.org/markup-compatibility/2006" type="fourObj" preserve="1">
+  <p:cSld name="Title, 4 Content">
+    <p:spTree>
+      <p:nvGrpSpPr>
+        <p:cNvPr id="1" name=""/>
+        <p:cNvGrpSpPr/>
+        <p:nvPr/>
+      </p:nvGrpSpPr>
+      <p:grpSpPr>
+        <a:xfrm>
+          <a:off x="0" y="0"/>
+          <a:ext cx="0" cy="0"/>
+          <a:chOff x="0" y="0"/>
+          <a:chExt cx="0" cy="0"/>
+        </a:xfrm>
+      </p:grpSpPr>
+      <p:sp>
+        <p:nvSpPr>
+          <p:cNvPr id="110" name="PlaceHolder 1"/>
+          <p:cNvSpPr>
+            <a:spLocks noGrp="1"/>
+          </p:cNvSpPr>
+          <p:nvPr>
+            <p:ph type="title"/>
+          </p:nvPr>
+        </p:nvSpPr>
+        <p:spPr>
+          <a:xfrm>
+            <a:off x="576000" y="2138040"/>
+            <a:ext cx="11035800" cy="1144800"/>
+          </a:xfrm>
+          <a:prstGeom prst="rect">
+            <a:avLst/>
+          </a:prstGeom>
+          <a:noFill/>
+          <a:ln w="0">
+            <a:noFill/>
+          </a:ln>
+        </p:spPr>
+        <p:txBody>
+          <a:bodyPr lIns="0" rIns="0" tIns="0" bIns="0" anchor="ctr">
+            <a:noAutofit/>
+          </a:bodyPr>
+          <a:p>
+            <a:pPr indent="0" algn="ctr">
+              <a:buNone/>
+            </a:pPr>
+            <a:endParaRPr b="0" lang="en-GB" sz="4400" spc="-1" strike="noStrike">
+              <a:latin typeface="Arial"/>
+            </a:endParaRPr>
+          </a:p>
+        </p:txBody>
+      </p:sp>
+      <p:sp>
+        <p:nvSpPr>
+          <p:cNvPr id="111" name="PlaceHolder 2"/>
+          <p:cNvSpPr>
+            <a:spLocks noGrp="1"/>
+          </p:cNvSpPr>
+          <p:nvPr>
+            <p:ph/>
+          </p:nvPr>
+        </p:nvSpPr>
+        <p:spPr>
+          <a:xfrm>
+            <a:off x="609480" y="1604520"/>
+            <a:ext cx="5354280" cy="1896840"/>
+          </a:xfrm>
+          <a:prstGeom prst="rect">
+            <a:avLst/>
+          </a:prstGeom>
+          <a:noFill/>
+          <a:ln w="0">
+            <a:noFill/>
+          </a:ln>
+        </p:spPr>
+        <p:txBody>
+          <a:bodyPr lIns="0" rIns="0" tIns="0" bIns="0" anchor="t">
+            <a:normAutofit/>
+          </a:bodyPr>
+          <a:p>
+            <a:pPr indent="0">
+              <a:spcBef>
+                <a:spcPts val="1417"/>
+              </a:spcBef>
+              <a:buNone/>
+            </a:pPr>
+            <a:endParaRPr b="0" lang="en-GB" sz="3200" spc="-1" strike="noStrike">
+              <a:latin typeface="Arial"/>
+            </a:endParaRPr>
+          </a:p>
+        </p:txBody>
+      </p:sp>
+      <p:sp>
+        <p:nvSpPr>
+          <p:cNvPr id="112" name="PlaceHolder 3"/>
+          <p:cNvSpPr>
+            <a:spLocks noGrp="1"/>
+          </p:cNvSpPr>
+          <p:nvPr>
+            <p:ph/>
+          </p:nvPr>
+        </p:nvSpPr>
+        <p:spPr>
+          <a:xfrm>
+            <a:off x="6231960" y="1604520"/>
+            <a:ext cx="5354280" cy="1896840"/>
+          </a:xfrm>
+          <a:prstGeom prst="rect">
+            <a:avLst/>
+          </a:prstGeom>
+          <a:noFill/>
+          <a:ln w="0">
+            <a:noFill/>
+          </a:ln>
+        </p:spPr>
+        <p:txBody>
+          <a:bodyPr lIns="0" rIns="0" tIns="0" bIns="0" anchor="t">
+            <a:normAutofit/>
+          </a:bodyPr>
+          <a:p>
+            <a:pPr indent="0">
+              <a:spcBef>
+                <a:spcPts val="1417"/>
+              </a:spcBef>
+              <a:buNone/>
+            </a:pPr>
+            <a:endParaRPr b="0" lang="en-GB" sz="3200" spc="-1" strike="noStrike">
+              <a:latin typeface="Arial"/>
+            </a:endParaRPr>
+          </a:p>
+        </p:txBody>
+      </p:sp>
+      <p:sp>
+        <p:nvSpPr>
+          <p:cNvPr id="113" name="PlaceHolder 4"/>
+          <p:cNvSpPr>
+            <a:spLocks noGrp="1"/>
+          </p:cNvSpPr>
+          <p:nvPr>
+            <p:ph/>
+          </p:nvPr>
+        </p:nvSpPr>
+        <p:spPr>
+          <a:xfrm>
+            <a:off x="609480" y="3682080"/>
+            <a:ext cx="5354280" cy="1896840"/>
+          </a:xfrm>
+          <a:prstGeom prst="rect">
+            <a:avLst/>
+          </a:prstGeom>
+          <a:noFill/>
+          <a:ln w="0">
+            <a:noFill/>
+          </a:ln>
+        </p:spPr>
+        <p:txBody>
+          <a:bodyPr lIns="0" rIns="0" tIns="0" bIns="0" anchor="t">
+            <a:normAutofit/>
+          </a:bodyPr>
+          <a:p>
+            <a:pPr indent="0">
+              <a:spcBef>
+                <a:spcPts val="1417"/>
+              </a:spcBef>
+              <a:buNone/>
+            </a:pPr>
+            <a:endParaRPr b="0" lang="en-GB" sz="3200" spc="-1" strike="noStrike">
+              <a:latin typeface="Arial"/>
+            </a:endParaRPr>
+          </a:p>
+        </p:txBody>
+      </p:sp>
+      <p:sp>
+        <p:nvSpPr>
+          <p:cNvPr id="114" name="PlaceHolder 5"/>
+          <p:cNvSpPr>
+            <a:spLocks noGrp="1"/>
+          </p:cNvSpPr>
+          <p:nvPr>
+            <p:ph/>
+          </p:nvPr>
+        </p:nvSpPr>
+        <p:spPr>
+          <a:xfrm>
+            <a:off x="6231960" y="3682080"/>
+            <a:ext cx="5354280" cy="1896840"/>
+          </a:xfrm>
+          <a:prstGeom prst="rect">
+            <a:avLst/>
+          </a:prstGeom>
+          <a:noFill/>
+          <a:ln w="0">
+            <a:noFill/>
+          </a:ln>
+        </p:spPr>
+        <p:txBody>
+          <a:bodyPr lIns="0" rIns="0" tIns="0" bIns="0" anchor="t">
+            <a:normAutofit/>
+          </a:bodyPr>
+          <a:p>
+            <a:pPr indent="0">
+              <a:spcBef>
+                <a:spcPts val="1417"/>
+              </a:spcBef>
+              <a:buNone/>
+            </a:pPr>
+            <a:endParaRPr b="0" lang="en-GB" sz="3200" spc="-1" strike="noStrike">
+              <a:latin typeface="Arial"/>
+            </a:endParaRPr>
+          </a:p>
+        </p:txBody>
+      </p:sp>
+    </p:spTree>
+  </p:cSld>
+</p:sldLayout>
+</file>
+
+<file path=ppt/slideLayouts/slideLayout36.xml><?xml version="1.0" encoding="utf-8"?>
+<p:sldLayout xmlns:a="http://schemas.openxmlformats.org/drawingml/2006/main" xmlns:p="http://schemas.openxmlformats.org/presentationml/2006/main" xmlns:r="http://schemas.openxmlformats.org/officeDocument/2006/relationships" xmlns:p14="http://schemas.microsoft.com/office/powerpoint/2010/main" xmlns:p15="http://schemas.microsoft.com/office/powerpoint/2012/main" xmlns:mc="http://schemas.openxmlformats.org/markup-compatibility/2006" type="blank" preserve="1">
+  <p:cSld name="Title, 6 Content">
+    <p:spTree>
+      <p:nvGrpSpPr>
+        <p:cNvPr id="1" name=""/>
+        <p:cNvGrpSpPr/>
+        <p:nvPr/>
+      </p:nvGrpSpPr>
+      <p:grpSpPr>
+        <a:xfrm>
+          <a:off x="0" y="0"/>
+          <a:ext cx="0" cy="0"/>
+          <a:chOff x="0" y="0"/>
+          <a:chExt cx="0" cy="0"/>
+        </a:xfrm>
+      </p:grpSpPr>
+      <p:sp>
+        <p:nvSpPr>
+          <p:cNvPr id="115" name="PlaceHolder 1"/>
+          <p:cNvSpPr>
+            <a:spLocks noGrp="1"/>
+          </p:cNvSpPr>
+          <p:nvPr>
+            <p:ph type="title"/>
+          </p:nvPr>
+        </p:nvSpPr>
+        <p:spPr>
+          <a:xfrm>
+            <a:off x="576000" y="2138040"/>
+            <a:ext cx="11035800" cy="1144800"/>
+          </a:xfrm>
+          <a:prstGeom prst="rect">
+            <a:avLst/>
+          </a:prstGeom>
+          <a:noFill/>
+          <a:ln w="0">
+            <a:noFill/>
+          </a:ln>
+        </p:spPr>
+        <p:txBody>
+          <a:bodyPr lIns="0" rIns="0" tIns="0" bIns="0" anchor="ctr">
+            <a:noAutofit/>
+          </a:bodyPr>
+          <a:p>
+            <a:pPr indent="0" algn="ctr">
+              <a:buNone/>
+            </a:pPr>
+            <a:endParaRPr b="0" lang="en-GB" sz="4400" spc="-1" strike="noStrike">
+              <a:latin typeface="Arial"/>
+            </a:endParaRPr>
+          </a:p>
+        </p:txBody>
+      </p:sp>
+      <p:sp>
+        <p:nvSpPr>
+          <p:cNvPr id="116" name="PlaceHolder 2"/>
+          <p:cNvSpPr>
+            <a:spLocks noGrp="1"/>
+          </p:cNvSpPr>
+          <p:nvPr>
+            <p:ph/>
+          </p:nvPr>
+        </p:nvSpPr>
+        <p:spPr>
+          <a:xfrm>
+            <a:off x="609480" y="1604520"/>
+            <a:ext cx="3532680" cy="1896840"/>
+          </a:xfrm>
+          <a:prstGeom prst="rect">
+            <a:avLst/>
+          </a:prstGeom>
+          <a:noFill/>
+          <a:ln w="0">
+            <a:noFill/>
+          </a:ln>
+        </p:spPr>
+        <p:txBody>
+          <a:bodyPr lIns="0" rIns="0" tIns="0" bIns="0" anchor="t">
+            <a:normAutofit/>
+          </a:bodyPr>
+          <a:p>
+            <a:pPr indent="0">
+              <a:spcBef>
+                <a:spcPts val="1417"/>
+              </a:spcBef>
+              <a:buNone/>
+            </a:pPr>
+            <a:endParaRPr b="0" lang="en-GB" sz="3200" spc="-1" strike="noStrike">
+              <a:latin typeface="Arial"/>
+            </a:endParaRPr>
+          </a:p>
+        </p:txBody>
+      </p:sp>
+      <p:sp>
+        <p:nvSpPr>
+          <p:cNvPr id="117" name="PlaceHolder 3"/>
+          <p:cNvSpPr>
+            <a:spLocks noGrp="1"/>
+          </p:cNvSpPr>
+          <p:nvPr>
+            <p:ph/>
+          </p:nvPr>
+        </p:nvSpPr>
+        <p:spPr>
+          <a:xfrm>
+            <a:off x="4319280" y="1604520"/>
+            <a:ext cx="3532680" cy="1896840"/>
+          </a:xfrm>
+          <a:prstGeom prst="rect">
+            <a:avLst/>
+          </a:prstGeom>
+          <a:noFill/>
+          <a:ln w="0">
+            <a:noFill/>
+          </a:ln>
+        </p:spPr>
+        <p:txBody>
+          <a:bodyPr lIns="0" rIns="0" tIns="0" bIns="0" anchor="t">
+            <a:normAutofit/>
+          </a:bodyPr>
+          <a:p>
+            <a:pPr indent="0">
+              <a:spcBef>
+                <a:spcPts val="1417"/>
+              </a:spcBef>
+              <a:buNone/>
+            </a:pPr>
+            <a:endParaRPr b="0" lang="en-GB" sz="3200" spc="-1" strike="noStrike">
+              <a:latin typeface="Arial"/>
+            </a:endParaRPr>
+          </a:p>
+        </p:txBody>
+      </p:sp>
+      <p:sp>
+        <p:nvSpPr>
+          <p:cNvPr id="118" name="PlaceHolder 4"/>
+          <p:cNvSpPr>
+            <a:spLocks noGrp="1"/>
+          </p:cNvSpPr>
+          <p:nvPr>
+            <p:ph/>
+          </p:nvPr>
+        </p:nvSpPr>
+        <p:spPr>
+          <a:xfrm>
+            <a:off x="8028720" y="1604520"/>
+            <a:ext cx="3532680" cy="1896840"/>
+          </a:xfrm>
+          <a:prstGeom prst="rect">
+            <a:avLst/>
+          </a:prstGeom>
+          <a:noFill/>
+          <a:ln w="0">
+            <a:noFill/>
+          </a:ln>
+        </p:spPr>
+        <p:txBody>
+          <a:bodyPr lIns="0" rIns="0" tIns="0" bIns="0" anchor="t">
+            <a:normAutofit/>
+          </a:bodyPr>
+          <a:p>
+            <a:pPr indent="0">
+              <a:spcBef>
+                <a:spcPts val="1417"/>
+              </a:spcBef>
+              <a:buNone/>
+            </a:pPr>
+            <a:endParaRPr b="0" lang="en-GB" sz="3200" spc="-1" strike="noStrike">
+              <a:latin typeface="Arial"/>
+            </a:endParaRPr>
+          </a:p>
+        </p:txBody>
+      </p:sp>
+      <p:sp>
+        <p:nvSpPr>
+          <p:cNvPr id="119" name="PlaceHolder 5"/>
+          <p:cNvSpPr>
+            <a:spLocks noGrp="1"/>
+          </p:cNvSpPr>
+          <p:nvPr>
+            <p:ph/>
+          </p:nvPr>
+        </p:nvSpPr>
+        <p:spPr>
+          <a:xfrm>
+            <a:off x="609480" y="3682080"/>
+            <a:ext cx="3532680" cy="1896840"/>
+          </a:xfrm>
+          <a:prstGeom prst="rect">
+            <a:avLst/>
+          </a:prstGeom>
+          <a:noFill/>
+          <a:ln w="0">
+            <a:noFill/>
+          </a:ln>
+        </p:spPr>
+        <p:txBody>
+          <a:bodyPr lIns="0" rIns="0" tIns="0" bIns="0" anchor="t">
+            <a:normAutofit/>
+          </a:bodyPr>
+          <a:p>
+            <a:pPr indent="0">
+              <a:spcBef>
+                <a:spcPts val="1417"/>
+              </a:spcBef>
+              <a:buNone/>
+            </a:pPr>
+            <a:endParaRPr b="0" lang="en-GB" sz="3200" spc="-1" strike="noStrike">
+              <a:latin typeface="Arial"/>
+            </a:endParaRPr>
+          </a:p>
+        </p:txBody>
+      </p:sp>
+      <p:sp>
+        <p:nvSpPr>
+          <p:cNvPr id="120" name="PlaceHolder 6"/>
+          <p:cNvSpPr>
+            <a:spLocks noGrp="1"/>
+          </p:cNvSpPr>
+          <p:nvPr>
+            <p:ph/>
+          </p:nvPr>
+        </p:nvSpPr>
+        <p:spPr>
+          <a:xfrm>
+            <a:off x="4319280" y="3682080"/>
+            <a:ext cx="3532680" cy="1896840"/>
+          </a:xfrm>
+          <a:prstGeom prst="rect">
+            <a:avLst/>
+          </a:prstGeom>
+          <a:noFill/>
+          <a:ln w="0">
+            <a:noFill/>
+          </a:ln>
+        </p:spPr>
+        <p:txBody>
+          <a:bodyPr lIns="0" rIns="0" tIns="0" bIns="0" anchor="t">
+            <a:normAutofit/>
+          </a:bodyPr>
+          <a:p>
+            <a:pPr indent="0">
+              <a:spcBef>
+                <a:spcPts val="1417"/>
+              </a:spcBef>
+              <a:buNone/>
+            </a:pPr>
+            <a:endParaRPr b="0" lang="en-GB" sz="3200" spc="-1" strike="noStrike">
+              <a:latin typeface="Arial"/>
+            </a:endParaRPr>
+          </a:p>
+        </p:txBody>
+      </p:sp>
+      <p:sp>
+        <p:nvSpPr>
+          <p:cNvPr id="121" name="PlaceHolder 7"/>
+          <p:cNvSpPr>
+            <a:spLocks noGrp="1"/>
+          </p:cNvSpPr>
+          <p:nvPr>
+            <p:ph/>
+          </p:nvPr>
+        </p:nvSpPr>
+        <p:spPr>
+          <a:xfrm>
+            <a:off x="8028720" y="3682080"/>
+            <a:ext cx="3532680" cy="1896840"/>
           </a:xfrm>
           <a:prstGeom prst="rect">
             <a:avLst/>
@@ -2589,7 +4257,7 @@
         <p:spPr>
           <a:xfrm>
             <a:off x="576000" y="2138040"/>
-            <a:ext cx="11036160" cy="1145160"/>
+            <a:ext cx="11035800" cy="1144800"/>
           </a:xfrm>
           <a:prstGeom prst="rect">
             <a:avLst/>
@@ -2626,7 +4294,7 @@
         <p:spPr>
           <a:xfrm>
             <a:off x="609480" y="1604520"/>
-            <a:ext cx="5354280" cy="3977280"/>
+            <a:ext cx="5354280" cy="3976920"/>
           </a:xfrm>
           <a:prstGeom prst="rect">
             <a:avLst/>
@@ -2666,7 +4334,7 @@
         <p:spPr>
           <a:xfrm>
             <a:off x="6231960" y="1604520"/>
-            <a:ext cx="5354280" cy="3977280"/>
+            <a:ext cx="5354280" cy="3976920"/>
           </a:xfrm>
           <a:prstGeom prst="rect">
             <a:avLst/>
@@ -2728,7 +4396,7 @@
         <p:spPr>
           <a:xfrm>
             <a:off x="576000" y="2138040"/>
-            <a:ext cx="11036160" cy="1145160"/>
+            <a:ext cx="11035800" cy="1144800"/>
           </a:xfrm>
           <a:prstGeom prst="rect">
             <a:avLst/>
@@ -2787,7 +4455,7 @@
         <p:spPr>
           <a:xfrm>
             <a:off x="576000" y="2138040"/>
-            <a:ext cx="11036160" cy="5309640"/>
+            <a:ext cx="11035800" cy="5307840"/>
           </a:xfrm>
           <a:prstGeom prst="rect">
             <a:avLst/>
@@ -2844,7 +4512,7 @@
         <p:spPr>
           <a:xfrm>
             <a:off x="576000" y="2138040"/>
-            <a:ext cx="11036160" cy="1145160"/>
+            <a:ext cx="11035800" cy="1144800"/>
           </a:xfrm>
           <a:prstGeom prst="rect">
             <a:avLst/>
@@ -2921,7 +4589,7 @@
         <p:spPr>
           <a:xfrm>
             <a:off x="6231960" y="1604520"/>
-            <a:ext cx="5354280" cy="3977280"/>
+            <a:ext cx="5354280" cy="3976920"/>
           </a:xfrm>
           <a:prstGeom prst="rect">
             <a:avLst/>
@@ -3023,7 +4691,7 @@
         <p:spPr>
           <a:xfrm>
             <a:off x="576000" y="2138040"/>
-            <a:ext cx="11036160" cy="1145160"/>
+            <a:ext cx="11035800" cy="1144800"/>
           </a:xfrm>
           <a:prstGeom prst="rect">
             <a:avLst/>
@@ -3060,7 +4728,7 @@
         <p:spPr>
           <a:xfrm>
             <a:off x="609480" y="1604520"/>
-            <a:ext cx="5354280" cy="3977280"/>
+            <a:ext cx="5354280" cy="3976920"/>
           </a:xfrm>
           <a:prstGeom prst="rect">
             <a:avLst/>
@@ -3202,7 +4870,7 @@
         <p:spPr>
           <a:xfrm>
             <a:off x="576000" y="2138040"/>
-            <a:ext cx="11036160" cy="1145160"/>
+            <a:ext cx="11035800" cy="1144800"/>
           </a:xfrm>
           <a:prstGeom prst="rect">
             <a:avLst/>
@@ -3319,7 +4987,7 @@
         <p:spPr>
           <a:xfrm>
             <a:off x="609480" y="3682080"/>
-            <a:ext cx="10972440" cy="1896840"/>
+            <a:ext cx="10972080" cy="1896840"/>
           </a:xfrm>
           <a:prstGeom prst="rect">
             <a:avLst/>
@@ -3383,8 +5051,8 @@
         </p:nvSpPr>
         <p:spPr>
           <a:xfrm rot="5400000">
-            <a:off x="858240" y="345960"/>
-            <a:ext cx="145440" cy="703440"/>
+            <a:off x="858600" y="345600"/>
+            <a:ext cx="145080" cy="703080"/>
           </a:xfrm>
           <a:prstGeom prst="rect">
             <a:avLst/>
@@ -3419,8 +5087,8 @@
         </p:nvSpPr>
         <p:spPr>
           <a:xfrm flipV="1">
-            <a:off x="578520" y="4499640"/>
-            <a:ext cx="11034000" cy="17640"/>
+            <a:off x="578520" y="4499280"/>
+            <a:ext cx="11033640" cy="17280"/>
           </a:xfrm>
           <a:prstGeom prst="rect">
             <a:avLst/>
@@ -3463,7 +5131,7 @@
         <p:spPr>
           <a:xfrm>
             <a:off x="576000" y="2138040"/>
-            <a:ext cx="11036160" cy="1145160"/>
+            <a:ext cx="11035800" cy="1144800"/>
           </a:xfrm>
           <a:prstGeom prst="rect">
             <a:avLst/>
@@ -3506,7 +5174,7 @@
         <p:spPr>
           <a:xfrm>
             <a:off x="609480" y="1604520"/>
-            <a:ext cx="10972440" cy="3977280"/>
+            <a:ext cx="10972080" cy="3976920"/>
           </a:xfrm>
           <a:prstGeom prst="rect">
             <a:avLst/>
@@ -3533,12 +5201,12 @@
               <a:buChar char=""/>
             </a:pPr>
             <a:r>
-              <a:rPr b="0" lang="en-GB" sz="3200" spc="-1" strike="noStrike">
+              <a:rPr b="0" lang="en-GB" sz="1800" spc="-1" strike="noStrike">
                 <a:latin typeface="Arial"/>
               </a:rPr>
               <a:t>Click to edit the outline text format</a:t>
             </a:r>
-            <a:endParaRPr b="0" lang="en-GB" sz="3200" spc="-1" strike="noStrike">
+            <a:endParaRPr b="0" lang="en-GB" sz="1800" spc="-1" strike="noStrike">
               <a:latin typeface="Arial"/>
             </a:endParaRPr>
           </a:p>
@@ -3555,12 +5223,12 @@
               <a:buChar char=""/>
             </a:pPr>
             <a:r>
-              <a:rPr b="0" lang="en-GB" sz="2800" spc="-1" strike="noStrike">
+              <a:rPr b="0" lang="en-GB" sz="1800" spc="-1" strike="noStrike">
                 <a:latin typeface="Arial"/>
               </a:rPr>
               <a:t>Second Outline Level</a:t>
             </a:r>
-            <a:endParaRPr b="0" lang="en-GB" sz="2800" spc="-1" strike="noStrike">
+            <a:endParaRPr b="0" lang="en-GB" sz="1800" spc="-1" strike="noStrike">
               <a:latin typeface="Arial"/>
             </a:endParaRPr>
           </a:p>
@@ -3577,12 +5245,12 @@
               <a:buChar char=""/>
             </a:pPr>
             <a:r>
-              <a:rPr b="0" lang="en-GB" sz="2400" spc="-1" strike="noStrike">
+              <a:rPr b="0" lang="en-GB" sz="1800" spc="-1" strike="noStrike">
                 <a:latin typeface="Arial"/>
               </a:rPr>
               <a:t>Third Outline Level</a:t>
             </a:r>
-            <a:endParaRPr b="0" lang="en-GB" sz="2400" spc="-1" strike="noStrike">
+            <a:endParaRPr b="0" lang="en-GB" sz="1800" spc="-1" strike="noStrike">
               <a:latin typeface="Arial"/>
             </a:endParaRPr>
           </a:p>
@@ -3599,12 +5267,12 @@
               <a:buChar char=""/>
             </a:pPr>
             <a:r>
-              <a:rPr b="0" lang="en-GB" sz="2000" spc="-1" strike="noStrike">
+              <a:rPr b="0" lang="en-GB" sz="1800" spc="-1" strike="noStrike">
                 <a:latin typeface="Arial"/>
               </a:rPr>
               <a:t>Fourth Outline Level</a:t>
             </a:r>
-            <a:endParaRPr b="0" lang="en-GB" sz="2000" spc="-1" strike="noStrike">
+            <a:endParaRPr b="0" lang="en-GB" sz="1800" spc="-1" strike="noStrike">
               <a:latin typeface="Arial"/>
             </a:endParaRPr>
           </a:p>
@@ -3621,12 +5289,12 @@
               <a:buChar char=""/>
             </a:pPr>
             <a:r>
-              <a:rPr b="0" lang="en-GB" sz="2000" spc="-1" strike="noStrike">
+              <a:rPr b="0" lang="en-GB" sz="1800" spc="-1" strike="noStrike">
                 <a:latin typeface="Arial"/>
               </a:rPr>
               <a:t>Fifth Outline Level</a:t>
             </a:r>
-            <a:endParaRPr b="0" lang="en-GB" sz="2000" spc="-1" strike="noStrike">
+            <a:endParaRPr b="0" lang="en-GB" sz="1800" spc="-1" strike="noStrike">
               <a:latin typeface="Arial"/>
             </a:endParaRPr>
           </a:p>
@@ -3643,12 +5311,12 @@
               <a:buChar char=""/>
             </a:pPr>
             <a:r>
-              <a:rPr b="0" lang="en-GB" sz="2000" spc="-1" strike="noStrike">
+              <a:rPr b="0" lang="en-GB" sz="1800" spc="-1" strike="noStrike">
                 <a:latin typeface="Arial"/>
               </a:rPr>
               <a:t>Sixth Outline Level</a:t>
             </a:r>
-            <a:endParaRPr b="0" lang="en-GB" sz="2000" spc="-1" strike="noStrike">
+            <a:endParaRPr b="0" lang="en-GB" sz="1800" spc="-1" strike="noStrike">
               <a:latin typeface="Arial"/>
             </a:endParaRPr>
           </a:p>
@@ -3665,12 +5333,12 @@
               <a:buChar char=""/>
             </a:pPr>
             <a:r>
-              <a:rPr b="0" lang="en-GB" sz="2000" spc="-1" strike="noStrike">
+              <a:rPr b="0" lang="en-GB" sz="1800" spc="-1" strike="noStrike">
                 <a:latin typeface="Arial"/>
               </a:rPr>
               <a:t>Seventh Outline Level</a:t>
             </a:r>
-            <a:endParaRPr b="0" lang="en-GB" sz="2000" spc="-1" strike="noStrike">
+            <a:endParaRPr b="0" lang="en-GB" sz="1800" spc="-1" strike="noStrike">
               <a:latin typeface="Arial"/>
             </a:endParaRPr>
           </a:p>
@@ -3729,7 +5397,7 @@
         <p:spPr>
           <a:xfrm>
             <a:off x="558360" y="0"/>
-            <a:ext cx="11166840" cy="2018160"/>
+            <a:ext cx="11166480" cy="2017800"/>
           </a:xfrm>
           <a:prstGeom prst="rect">
             <a:avLst/>
@@ -3739,10 +5407,7 @@
           </a:solidFill>
           <a:ln w="9360">
             <a:solidFill>
-              <a:srgbClr val="412426">
-                <a:lumMod val="10000"/>
-                <a:lumOff val="90000"/>
-              </a:srgbClr>
+              <a:srgbClr val="f0e5e5"/>
             </a:solidFill>
             <a:round/>
           </a:ln>
@@ -3779,7 +5444,7 @@
         <p:spPr>
           <a:xfrm>
             <a:off x="567000" y="0"/>
-            <a:ext cx="11154960" cy="2010960"/>
+            <a:ext cx="11154600" cy="2010600"/>
           </a:xfrm>
           <a:prstGeom prst="rect">
             <a:avLst/>
@@ -3815,7 +5480,7 @@
         <p:spPr>
           <a:xfrm>
             <a:off x="498960" y="787320"/>
-            <a:ext cx="127440" cy="703440"/>
+            <a:ext cx="127080" cy="703080"/>
           </a:xfrm>
           <a:prstGeom prst="rect">
             <a:avLst/>
@@ -4084,6 +5749,395 @@
     <p:sldLayoutId id="2147483671" r:id="rId11"/>
     <p:sldLayoutId id="2147483672" r:id="rId12"/>
     <p:sldLayoutId id="2147483673" r:id="rId13"/>
+  </p:sldLayoutIdLst>
+</p:sldMaster>
+</file>
+
+<file path=ppt/slideMasters/slideMaster3.xml><?xml version="1.0" encoding="utf-8"?>
+<p:sldMaster xmlns:a="http://schemas.openxmlformats.org/drawingml/2006/main" xmlns:p="http://schemas.openxmlformats.org/presentationml/2006/main" xmlns:r="http://schemas.openxmlformats.org/officeDocument/2006/relationships" xmlns:p14="http://schemas.microsoft.com/office/powerpoint/2010/main" xmlns:p15="http://schemas.microsoft.com/office/powerpoint/2012/main" xmlns:mc="http://schemas.openxmlformats.org/markup-compatibility/2006">
+  <p:cSld>
+    <p:bg>
+      <p:bgPr>
+        <a:solidFill>
+          <a:srgbClr val="ffffff"/>
+        </a:solidFill>
+      </p:bgPr>
+    </p:bg>
+    <p:spTree>
+      <p:nvGrpSpPr>
+        <p:cNvPr id="1" name=""/>
+        <p:cNvGrpSpPr/>
+        <p:nvPr/>
+      </p:nvGrpSpPr>
+      <p:grpSpPr>
+        <a:xfrm>
+          <a:off x="0" y="0"/>
+          <a:ext cx="0" cy="0"/>
+          <a:chOff x="0" y="0"/>
+          <a:chExt cx="0" cy="0"/>
+        </a:xfrm>
+      </p:grpSpPr>
+      <p:sp>
+        <p:nvSpPr>
+          <p:cNvPr id="81" name="CustomShape 1"/>
+          <p:cNvSpPr/>
+          <p:nvPr/>
+        </p:nvSpPr>
+        <p:spPr>
+          <a:xfrm>
+            <a:off x="558360" y="0"/>
+            <a:ext cx="11166480" cy="2017800"/>
+          </a:xfrm>
+          <a:prstGeom prst="rect">
+            <a:avLst/>
+          </a:prstGeom>
+          <a:solidFill>
+            <a:srgbClr val="c34d54"/>
+          </a:solidFill>
+          <a:ln w="9360">
+            <a:solidFill>
+              <a:srgbClr val="f0e5e5"/>
+            </a:solidFill>
+            <a:round/>
+          </a:ln>
+          <a:effectLst>
+            <a:outerShdw algn="tl" blurRad="50760" dir="2700000" dist="37674" rotWithShape="0">
+              <a:schemeClr val="bg1">
+                <a:lumMod val="85000"/>
+                <a:alpha val="30000"/>
+              </a:schemeClr>
+            </a:outerShdw>
+          </a:effectLst>
+        </p:spPr>
+        <p:style>
+          <a:lnRef idx="2">
+            <a:schemeClr val="accent1">
+              <a:shade val="50000"/>
+            </a:schemeClr>
+          </a:lnRef>
+          <a:fillRef idx="1">
+            <a:schemeClr val="accent1"/>
+          </a:fillRef>
+          <a:effectRef idx="0">
+            <a:schemeClr val="accent1"/>
+          </a:effectRef>
+          <a:fontRef idx="minor"/>
+        </p:style>
+      </p:sp>
+      <p:sp>
+        <p:nvSpPr>
+          <p:cNvPr id="82" name="CustomShape 2"/>
+          <p:cNvSpPr/>
+          <p:nvPr/>
+        </p:nvSpPr>
+        <p:spPr>
+          <a:xfrm>
+            <a:off x="567000" y="0"/>
+            <a:ext cx="11154600" cy="2010600"/>
+          </a:xfrm>
+          <a:prstGeom prst="rect">
+            <a:avLst/>
+          </a:prstGeom>
+          <a:solidFill>
+            <a:srgbClr val="c34d54"/>
+          </a:solidFill>
+          <a:ln w="9360">
+            <a:noFill/>
+          </a:ln>
+        </p:spPr>
+        <p:style>
+          <a:lnRef idx="2">
+            <a:schemeClr val="accent1">
+              <a:shade val="50000"/>
+            </a:schemeClr>
+          </a:lnRef>
+          <a:fillRef idx="1">
+            <a:schemeClr val="accent1"/>
+          </a:fillRef>
+          <a:effectRef idx="0">
+            <a:schemeClr val="accent1"/>
+          </a:effectRef>
+          <a:fontRef idx="minor"/>
+        </p:style>
+      </p:sp>
+      <p:sp>
+        <p:nvSpPr>
+          <p:cNvPr id="83" name="CustomShape 3"/>
+          <p:cNvSpPr/>
+          <p:nvPr/>
+        </p:nvSpPr>
+        <p:spPr>
+          <a:xfrm>
+            <a:off x="498960" y="787320"/>
+            <a:ext cx="127080" cy="703080"/>
+          </a:xfrm>
+          <a:prstGeom prst="rect">
+            <a:avLst/>
+          </a:prstGeom>
+          <a:solidFill>
+            <a:schemeClr val="accent1"/>
+          </a:solidFill>
+          <a:ln>
+            <a:noFill/>
+          </a:ln>
+        </p:spPr>
+        <p:style>
+          <a:lnRef idx="2">
+            <a:schemeClr val="accent1">
+              <a:shade val="50000"/>
+            </a:schemeClr>
+          </a:lnRef>
+          <a:fillRef idx="1">
+            <a:schemeClr val="accent1"/>
+          </a:fillRef>
+          <a:effectRef idx="0">
+            <a:schemeClr val="accent1"/>
+          </a:effectRef>
+          <a:fontRef idx="minor"/>
+        </p:style>
+      </p:sp>
+      <p:sp>
+        <p:nvSpPr>
+          <p:cNvPr id="84" name="PlaceHolder 1"/>
+          <p:cNvSpPr>
+            <a:spLocks noGrp="1"/>
+          </p:cNvSpPr>
+          <p:nvPr>
+            <p:ph type="title"/>
+          </p:nvPr>
+        </p:nvSpPr>
+        <p:spPr>
+          <a:xfrm>
+            <a:off x="609480" y="273600"/>
+            <a:ext cx="10972440" cy="1144800"/>
+          </a:xfrm>
+          <a:prstGeom prst="rect">
+            <a:avLst/>
+          </a:prstGeom>
+          <a:noFill/>
+          <a:ln w="0">
+            <a:noFill/>
+          </a:ln>
+        </p:spPr>
+        <p:txBody>
+          <a:bodyPr lIns="0" rIns="0" tIns="0" bIns="0" anchor="ctr">
+            <a:noAutofit/>
+          </a:bodyPr>
+          <a:p>
+            <a:pPr indent="0" algn="ctr">
+              <a:buNone/>
+            </a:pPr>
+            <a:r>
+              <a:rPr b="0" lang="en-GB" sz="4400" spc="-1" strike="noStrike">
+                <a:latin typeface="Arial"/>
+              </a:rPr>
+              <a:t>Click to edit the title text format</a:t>
+            </a:r>
+            <a:endParaRPr b="0" lang="en-GB" sz="4400" spc="-1" strike="noStrike">
+              <a:latin typeface="Arial"/>
+            </a:endParaRPr>
+          </a:p>
+        </p:txBody>
+      </p:sp>
+      <p:sp>
+        <p:nvSpPr>
+          <p:cNvPr id="85" name="PlaceHolder 2"/>
+          <p:cNvSpPr>
+            <a:spLocks noGrp="1"/>
+          </p:cNvSpPr>
+          <p:nvPr>
+            <p:ph type="body"/>
+          </p:nvPr>
+        </p:nvSpPr>
+        <p:spPr>
+          <a:xfrm>
+            <a:off x="609480" y="1604520"/>
+            <a:ext cx="10972440" cy="3977280"/>
+          </a:xfrm>
+          <a:prstGeom prst="rect">
+            <a:avLst/>
+          </a:prstGeom>
+          <a:noFill/>
+          <a:ln w="0">
+            <a:noFill/>
+          </a:ln>
+        </p:spPr>
+        <p:txBody>
+          <a:bodyPr lIns="0" rIns="0" tIns="0" bIns="0" anchor="t">
+            <a:normAutofit/>
+          </a:bodyPr>
+          <a:p>
+            <a:pPr marL="432000" indent="-324000">
+              <a:spcBef>
+                <a:spcPts val="1417"/>
+              </a:spcBef>
+              <a:buClr>
+                <a:srgbClr val="000000"/>
+              </a:buClr>
+              <a:buSzPct val="45000"/>
+              <a:buFont typeface="Wingdings" charset="2"/>
+              <a:buChar char=""/>
+            </a:pPr>
+            <a:r>
+              <a:rPr b="0" lang="en-GB" sz="3200" spc="-1" strike="noStrike">
+                <a:latin typeface="Arial"/>
+              </a:rPr>
+              <a:t>Click to edit the outline text format</a:t>
+            </a:r>
+            <a:endParaRPr b="0" lang="en-GB" sz="3200" spc="-1" strike="noStrike">
+              <a:latin typeface="Arial"/>
+            </a:endParaRPr>
+          </a:p>
+          <a:p>
+            <a:pPr lvl="1" marL="864000" indent="-324000">
+              <a:spcBef>
+                <a:spcPts val="1134"/>
+              </a:spcBef>
+              <a:buClr>
+                <a:srgbClr val="000000"/>
+              </a:buClr>
+              <a:buSzPct val="75000"/>
+              <a:buFont typeface="Symbol" charset="2"/>
+              <a:buChar char=""/>
+            </a:pPr>
+            <a:r>
+              <a:rPr b="0" lang="en-GB" sz="2800" spc="-1" strike="noStrike">
+                <a:latin typeface="Arial"/>
+              </a:rPr>
+              <a:t>Second Outline Level</a:t>
+            </a:r>
+            <a:endParaRPr b="0" lang="en-GB" sz="2800" spc="-1" strike="noStrike">
+              <a:latin typeface="Arial"/>
+            </a:endParaRPr>
+          </a:p>
+          <a:p>
+            <a:pPr lvl="2" marL="1296000" indent="-288000">
+              <a:spcBef>
+                <a:spcPts val="850"/>
+              </a:spcBef>
+              <a:buClr>
+                <a:srgbClr val="000000"/>
+              </a:buClr>
+              <a:buSzPct val="45000"/>
+              <a:buFont typeface="Wingdings" charset="2"/>
+              <a:buChar char=""/>
+            </a:pPr>
+            <a:r>
+              <a:rPr b="0" lang="en-GB" sz="2400" spc="-1" strike="noStrike">
+                <a:latin typeface="Arial"/>
+              </a:rPr>
+              <a:t>Third Outline Level</a:t>
+            </a:r>
+            <a:endParaRPr b="0" lang="en-GB" sz="2400" spc="-1" strike="noStrike">
+              <a:latin typeface="Arial"/>
+            </a:endParaRPr>
+          </a:p>
+          <a:p>
+            <a:pPr lvl="3" marL="1728000" indent="-216000">
+              <a:spcBef>
+                <a:spcPts val="567"/>
+              </a:spcBef>
+              <a:buClr>
+                <a:srgbClr val="000000"/>
+              </a:buClr>
+              <a:buSzPct val="75000"/>
+              <a:buFont typeface="Symbol" charset="2"/>
+              <a:buChar char=""/>
+            </a:pPr>
+            <a:r>
+              <a:rPr b="0" lang="en-GB" sz="2000" spc="-1" strike="noStrike">
+                <a:latin typeface="Arial"/>
+              </a:rPr>
+              <a:t>Fourth Outline Level</a:t>
+            </a:r>
+            <a:endParaRPr b="0" lang="en-GB" sz="2000" spc="-1" strike="noStrike">
+              <a:latin typeface="Arial"/>
+            </a:endParaRPr>
+          </a:p>
+          <a:p>
+            <a:pPr lvl="4" marL="2160000" indent="-216000">
+              <a:spcBef>
+                <a:spcPts val="283"/>
+              </a:spcBef>
+              <a:buClr>
+                <a:srgbClr val="000000"/>
+              </a:buClr>
+              <a:buSzPct val="45000"/>
+              <a:buFont typeface="Wingdings" charset="2"/>
+              <a:buChar char=""/>
+            </a:pPr>
+            <a:r>
+              <a:rPr b="0" lang="en-GB" sz="2000" spc="-1" strike="noStrike">
+                <a:latin typeface="Arial"/>
+              </a:rPr>
+              <a:t>Fifth Outline Level</a:t>
+            </a:r>
+            <a:endParaRPr b="0" lang="en-GB" sz="2000" spc="-1" strike="noStrike">
+              <a:latin typeface="Arial"/>
+            </a:endParaRPr>
+          </a:p>
+          <a:p>
+            <a:pPr lvl="5" marL="2592000" indent="-216000">
+              <a:spcBef>
+                <a:spcPts val="283"/>
+              </a:spcBef>
+              <a:buClr>
+                <a:srgbClr val="000000"/>
+              </a:buClr>
+              <a:buSzPct val="45000"/>
+              <a:buFont typeface="Wingdings" charset="2"/>
+              <a:buChar char=""/>
+            </a:pPr>
+            <a:r>
+              <a:rPr b="0" lang="en-GB" sz="2000" spc="-1" strike="noStrike">
+                <a:latin typeface="Arial"/>
+              </a:rPr>
+              <a:t>Sixth Outline Level</a:t>
+            </a:r>
+            <a:endParaRPr b="0" lang="en-GB" sz="2000" spc="-1" strike="noStrike">
+              <a:latin typeface="Arial"/>
+            </a:endParaRPr>
+          </a:p>
+          <a:p>
+            <a:pPr lvl="6" marL="3024000" indent="-216000">
+              <a:spcBef>
+                <a:spcPts val="283"/>
+              </a:spcBef>
+              <a:buClr>
+                <a:srgbClr val="000000"/>
+              </a:buClr>
+              <a:buSzPct val="45000"/>
+              <a:buFont typeface="Wingdings" charset="2"/>
+              <a:buChar char=""/>
+            </a:pPr>
+            <a:r>
+              <a:rPr b="0" lang="en-GB" sz="2000" spc="-1" strike="noStrike">
+                <a:latin typeface="Arial"/>
+              </a:rPr>
+              <a:t>Seventh Outline Level</a:t>
+            </a:r>
+            <a:endParaRPr b="0" lang="en-GB" sz="2000" spc="-1" strike="noStrike">
+              <a:latin typeface="Arial"/>
+            </a:endParaRPr>
+          </a:p>
+        </p:txBody>
+      </p:sp>
+    </p:spTree>
+  </p:cSld>
+  <p:clrMap bg1="lt1" bg2="lt2" tx1="dk1" tx2="dk2" accent1="accent1" accent2="accent2" accent3="accent3" accent4="accent4" accent5="accent5" accent6="accent6" hlink="hlink" folHlink="folHlink"/>
+  <p:sldLayoutIdLst>
+    <p:sldLayoutId id="2147483675" r:id="rId2"/>
+    <p:sldLayoutId id="2147483676" r:id="rId3"/>
+    <p:sldLayoutId id="2147483677" r:id="rId4"/>
+    <p:sldLayoutId id="2147483678" r:id="rId5"/>
+    <p:sldLayoutId id="2147483679" r:id="rId6"/>
+    <p:sldLayoutId id="2147483680" r:id="rId7"/>
+    <p:sldLayoutId id="2147483681" r:id="rId8"/>
+    <p:sldLayoutId id="2147483682" r:id="rId9"/>
+    <p:sldLayoutId id="2147483683" r:id="rId10"/>
+    <p:sldLayoutId id="2147483684" r:id="rId11"/>
+    <p:sldLayoutId id="2147483685" r:id="rId12"/>
+    <p:sldLayoutId id="2147483686" r:id="rId13"/>
   </p:sldLayoutIdLst>
 </p:sldMaster>
 </file>
@@ -4114,14 +6168,14 @@
       </p:grpSpPr>
       <p:sp>
         <p:nvSpPr>
-          <p:cNvPr id="81" name="CustomShape 1"/>
+          <p:cNvPr id="122" name="CustomShape 1"/>
           <p:cNvSpPr/>
           <p:nvPr/>
         </p:nvSpPr>
         <p:spPr>
           <a:xfrm>
             <a:off x="0" y="0"/>
-            <a:ext cx="12191400" cy="6857280"/>
+            <a:ext cx="12191040" cy="6856920"/>
           </a:xfrm>
           <a:prstGeom prst="rect">
             <a:avLst/>
@@ -4150,7 +6204,7 @@
       </p:sp>
       <p:pic>
         <p:nvPicPr>
-          <p:cNvPr id="82" name="Picture 3" descr=""/>
+          <p:cNvPr id="123" name="Picture 3" descr=""/>
           <p:cNvPicPr/>
           <p:nvPr/>
         </p:nvPicPr>
@@ -4162,7 +6216,7 @@
         <p:spPr>
           <a:xfrm>
             <a:off x="0" y="0"/>
-            <a:ext cx="8667720" cy="6857280"/>
+            <a:ext cx="8667360" cy="6856920"/>
           </a:xfrm>
           <a:prstGeom prst="rect">
             <a:avLst/>
@@ -4174,14 +6228,14 @@
       </p:pic>
       <p:sp>
         <p:nvSpPr>
-          <p:cNvPr id="83" name="CustomShape 2"/>
+          <p:cNvPr id="124" name="CustomShape 2"/>
           <p:cNvSpPr/>
           <p:nvPr/>
         </p:nvSpPr>
         <p:spPr>
           <a:xfrm flipH="1">
             <a:off x="3710880" y="0"/>
-            <a:ext cx="8479800" cy="6857280"/>
+            <a:ext cx="8479440" cy="6856920"/>
           </a:xfrm>
           <a:prstGeom prst="rect">
             <a:avLst/>
@@ -4198,7 +6252,7 @@
                 <a:srgbClr val="ffffff"/>
               </a:gs>
             </a:gsLst>
-            <a:lin ang="0"/>
+            <a:lin ang="10800000"/>
           </a:gradFill>
           <a:ln>
             <a:noFill/>
@@ -4221,14 +6275,14 @@
       </p:sp>
       <p:sp>
         <p:nvSpPr>
-          <p:cNvPr id="84" name="TextShape 3"/>
+          <p:cNvPr id="125" name="TextShape 3"/>
           <p:cNvSpPr/>
           <p:nvPr/>
         </p:nvSpPr>
         <p:spPr>
           <a:xfrm>
             <a:off x="7848720" y="1122480"/>
-            <a:ext cx="4022640" cy="3203280"/>
+            <a:ext cx="4022280" cy="3202920"/>
           </a:xfrm>
           <a:prstGeom prst="rect">
             <a:avLst/>
@@ -4260,6 +6314,7 @@
                   <a:srgbClr val="000000"/>
                 </a:solidFill>
                 <a:latin typeface="Neue Haas Grotesk Text Pro"/>
+                <a:ea typeface="DejaVu Sans"/>
               </a:rPr>
               <a:t>Enginyeria del Software</a:t>
             </a:r>
@@ -4271,14 +6326,14 @@
       </p:sp>
       <p:sp>
         <p:nvSpPr>
-          <p:cNvPr id="85" name="CustomShape 4"/>
+          <p:cNvPr id="126" name="CustomShape 4"/>
           <p:cNvSpPr/>
           <p:nvPr/>
         </p:nvSpPr>
         <p:spPr>
           <a:xfrm rot="5400000">
-            <a:off x="8131320" y="345960"/>
-            <a:ext cx="145440" cy="703440"/>
+            <a:off x="8131680" y="345600"/>
+            <a:ext cx="145080" cy="703080"/>
           </a:xfrm>
           <a:prstGeom prst="rect">
             <a:avLst/>
@@ -4307,14 +6362,14 @@
       </p:sp>
       <p:sp>
         <p:nvSpPr>
-          <p:cNvPr id="86" name="CustomShape 5"/>
+          <p:cNvPr id="127" name="CustomShape 5"/>
           <p:cNvSpPr/>
           <p:nvPr/>
         </p:nvSpPr>
         <p:spPr>
           <a:xfrm>
             <a:off x="7851600" y="4546800"/>
-            <a:ext cx="4022640" cy="17640"/>
+            <a:ext cx="4022280" cy="17280"/>
           </a:xfrm>
           <a:prstGeom prst="rect">
             <a:avLst/>
@@ -4327,10 +6382,7 @@
           </a:solidFill>
           <a:ln w="3240">
             <a:solidFill>
-              <a:srgbClr val="412426">
-                <a:lumMod val="25000"/>
-                <a:lumOff val="75000"/>
-              </a:srgbClr>
+              <a:srgbClr val="dbbdbf"/>
             </a:solidFill>
             <a:round/>
           </a:ln>
@@ -4352,14 +6404,14 @@
       </p:sp>
       <p:sp>
         <p:nvSpPr>
-          <p:cNvPr id="87" name="CustomShape 6"/>
+          <p:cNvPr id="128" name="CustomShape 6"/>
           <p:cNvSpPr/>
           <p:nvPr/>
         </p:nvSpPr>
         <p:spPr>
           <a:xfrm>
             <a:off x="7848720" y="4872960"/>
-            <a:ext cx="4022640" cy="1358640"/>
+            <a:ext cx="4022280" cy="1358280"/>
           </a:xfrm>
           <a:prstGeom prst="rect">
             <a:avLst/>
@@ -4472,14 +6524,14 @@
       </p:grpSpPr>
       <p:sp>
         <p:nvSpPr>
-          <p:cNvPr id="88" name="TextShape 1"/>
+          <p:cNvPr id="129" name="TextShape 1"/>
           <p:cNvSpPr/>
           <p:nvPr/>
         </p:nvSpPr>
         <p:spPr>
           <a:xfrm>
             <a:off x="1115640" y="548640"/>
-            <a:ext cx="10167480" cy="1179000"/>
+            <a:ext cx="10167120" cy="1178640"/>
           </a:xfrm>
           <a:prstGeom prst="rect">
             <a:avLst/>
@@ -4511,6 +6563,7 @@
                   <a:srgbClr val="000000"/>
                 </a:solidFill>
                 <a:latin typeface="Neue Haas Grotesk Text Pro"/>
+                <a:ea typeface="DejaVu Sans"/>
               </a:rPr>
               <a:t>Composició de l’equip </a:t>
             </a:r>
@@ -4522,14 +6575,14 @@
       </p:sp>
       <p:sp>
         <p:nvSpPr>
-          <p:cNvPr id="89" name="TextShape 2"/>
+          <p:cNvPr id="130" name="TextShape 2"/>
           <p:cNvSpPr/>
           <p:nvPr/>
         </p:nvSpPr>
         <p:spPr>
           <a:xfrm>
             <a:off x="8540640" y="6356520"/>
-            <a:ext cx="2742480" cy="364320"/>
+            <a:ext cx="2742120" cy="363960"/>
           </a:xfrm>
           <a:prstGeom prst="rect">
             <a:avLst/>
@@ -4555,12 +6608,13 @@
                 <a:spcPct val="100000"/>
               </a:lnSpc>
             </a:pPr>
-            <a:fld id="{0254E35A-E896-445C-8167-17C559F418F7}" type="slidenum">
+            <a:fld id="{24FEED11-6B8D-417E-B370-1C5CA1D48F5A}" type="slidenum">
               <a:rPr b="0" lang="en-GB" sz="1200" spc="-1" strike="noStrike">
                 <a:solidFill>
                   <a:srgbClr val="8b8b8b"/>
                 </a:solidFill>
                 <a:latin typeface="Neue Haas Grotesk Text Pro"/>
+                <a:ea typeface="DejaVu Sans"/>
               </a:rPr>
               <a:t>1</a:t>
             </a:fld>
@@ -4572,14 +6626,14 @@
       </p:sp>
       <p:sp>
         <p:nvSpPr>
-          <p:cNvPr id="90" name="CustomShape 3"/>
+          <p:cNvPr id="131" name="CustomShape 3"/>
           <p:cNvSpPr/>
           <p:nvPr/>
         </p:nvSpPr>
         <p:spPr>
           <a:xfrm>
             <a:off x="3890520" y="3638520"/>
-            <a:ext cx="2316240" cy="912600"/>
+            <a:ext cx="2315880" cy="912600"/>
           </a:xfrm>
           <a:prstGeom prst="rect">
             <a:avLst/>
@@ -4633,14 +6687,14 @@
       </p:sp>
       <p:sp>
         <p:nvSpPr>
-          <p:cNvPr id="91" name="CustomShape 4"/>
+          <p:cNvPr id="132" name="CustomShape 4"/>
           <p:cNvSpPr/>
           <p:nvPr/>
         </p:nvSpPr>
         <p:spPr>
           <a:xfrm>
             <a:off x="6513120" y="3638520"/>
-            <a:ext cx="2316240" cy="638280"/>
+            <a:ext cx="2315880" cy="638280"/>
           </a:xfrm>
           <a:prstGeom prst="rect">
             <a:avLst/>
@@ -4684,14 +6738,14 @@
       </p:sp>
       <p:sp>
         <p:nvSpPr>
-          <p:cNvPr id="92" name="CustomShape 5"/>
+          <p:cNvPr id="133" name="CustomShape 5"/>
           <p:cNvSpPr/>
           <p:nvPr/>
         </p:nvSpPr>
         <p:spPr>
           <a:xfrm>
             <a:off x="3890520" y="5799240"/>
-            <a:ext cx="2316240" cy="638280"/>
+            <a:ext cx="2315880" cy="638280"/>
           </a:xfrm>
           <a:prstGeom prst="rect">
             <a:avLst/>
@@ -4748,14 +6802,14 @@
       </p:sp>
       <p:sp>
         <p:nvSpPr>
-          <p:cNvPr id="93" name="CustomShape 6"/>
+          <p:cNvPr id="134" name="CustomShape 6"/>
           <p:cNvSpPr/>
           <p:nvPr/>
         </p:nvSpPr>
         <p:spPr>
           <a:xfrm>
             <a:off x="6513120" y="5799240"/>
-            <a:ext cx="2316240" cy="638280"/>
+            <a:ext cx="2315880" cy="638280"/>
           </a:xfrm>
           <a:prstGeom prst="rect">
             <a:avLst/>
@@ -4799,7 +6853,7 @@
       </p:sp>
       <p:pic>
         <p:nvPicPr>
-          <p:cNvPr id="94" name="" descr=""/>
+          <p:cNvPr id="135" name="" descr=""/>
           <p:cNvPicPr/>
           <p:nvPr/>
         </p:nvPicPr>
@@ -4810,7 +6864,7 @@
         <p:spPr>
           <a:xfrm>
             <a:off x="6972120" y="4549680"/>
-            <a:ext cx="982800" cy="1229040"/>
+            <a:ext cx="982440" cy="1228680"/>
           </a:xfrm>
           <a:prstGeom prst="rect">
             <a:avLst/>
@@ -4822,7 +6876,7 @@
       </p:pic>
       <p:pic>
         <p:nvPicPr>
-          <p:cNvPr id="95" name="" descr=""/>
+          <p:cNvPr id="136" name="" descr=""/>
           <p:cNvPicPr/>
           <p:nvPr/>
         </p:nvPicPr>
@@ -4834,7 +6888,7 @@
         <p:spPr>
           <a:xfrm>
             <a:off x="4290480" y="2306520"/>
-            <a:ext cx="1106640" cy="1330560"/>
+            <a:ext cx="1106280" cy="1330200"/>
           </a:xfrm>
           <a:prstGeom prst="rect">
             <a:avLst/>
@@ -4846,7 +6900,7 @@
       </p:pic>
       <p:pic>
         <p:nvPicPr>
-          <p:cNvPr id="96" name="" descr=""/>
+          <p:cNvPr id="137" name="" descr=""/>
           <p:cNvPicPr/>
           <p:nvPr/>
         </p:nvPicPr>
@@ -4857,7 +6911,7 @@
         <p:spPr>
           <a:xfrm>
             <a:off x="6873480" y="2384280"/>
-            <a:ext cx="978120" cy="1206720"/>
+            <a:ext cx="977760" cy="1206360"/>
           </a:xfrm>
           <a:prstGeom prst="rect">
             <a:avLst/>
@@ -4869,7 +6923,7 @@
       </p:pic>
       <p:pic>
         <p:nvPicPr>
-          <p:cNvPr id="97" name="" descr=""/>
+          <p:cNvPr id="138" name="" descr=""/>
           <p:cNvPicPr/>
           <p:nvPr/>
         </p:nvPicPr>
@@ -4880,7 +6934,7 @@
         <p:spPr>
           <a:xfrm>
             <a:off x="4343040" y="4572000"/>
-            <a:ext cx="1031040" cy="1206720"/>
+            <a:ext cx="1030680" cy="1206360"/>
           </a:xfrm>
           <a:prstGeom prst="rect">
             <a:avLst/>
@@ -4922,14 +6976,14 @@
       </p:grpSpPr>
       <p:sp>
         <p:nvSpPr>
-          <p:cNvPr id="98" name="TextShape 1"/>
+          <p:cNvPr id="139" name="TextShape 1"/>
           <p:cNvSpPr/>
           <p:nvPr/>
         </p:nvSpPr>
         <p:spPr>
           <a:xfrm>
             <a:off x="1115640" y="548640"/>
-            <a:ext cx="10167480" cy="1179000"/>
+            <a:ext cx="10167120" cy="1178640"/>
           </a:xfrm>
           <a:prstGeom prst="rect">
             <a:avLst/>
@@ -4961,6 +7015,7 @@
                   <a:srgbClr val="000000"/>
                 </a:solidFill>
                 <a:latin typeface="Neue Haas Grotesk Text Pro"/>
+                <a:ea typeface="DejaVu Sans"/>
               </a:rPr>
               <a:t>Dades sprint</a:t>
             </a:r>
@@ -4970,6 +7025,7 @@
                   <a:srgbClr val="000000"/>
                 </a:solidFill>
                 <a:latin typeface="Neue Haas Grotesk Text Pro"/>
+                <a:ea typeface="DejaVu Sans"/>
               </a:rPr>
               <a:t>	</a:t>
             </a:r>
@@ -4981,14 +7037,14 @@
       </p:sp>
       <p:sp>
         <p:nvSpPr>
-          <p:cNvPr id="99" name="TextShape 2"/>
+          <p:cNvPr id="140" name="TextShape 2"/>
           <p:cNvSpPr/>
           <p:nvPr/>
         </p:nvSpPr>
         <p:spPr>
           <a:xfrm>
             <a:off x="1115640" y="2477880"/>
-            <a:ext cx="10167480" cy="3693600"/>
+            <a:ext cx="10167120" cy="3693240"/>
           </a:xfrm>
           <a:prstGeom prst="rect">
             <a:avLst/>
@@ -5028,6 +7084,7 @@
                   <a:srgbClr val="000000"/>
                 </a:solidFill>
                 <a:latin typeface="Neue Haas Grotesk Text Pro"/>
+                <a:ea typeface="DejaVu Sans"/>
               </a:rPr>
               <a:t>Data començament: 26 d’abril</a:t>
             </a:r>
@@ -5055,6 +7112,7 @@
                   <a:srgbClr val="000000"/>
                 </a:solidFill>
                 <a:latin typeface="Neue Haas Grotesk Text Pro"/>
+                <a:ea typeface="DejaVu Sans"/>
               </a:rPr>
               <a:t>Dates lliuraments Campus Virtual: 3 de maig, 6 de maig</a:t>
             </a:r>
@@ -5082,6 +7140,7 @@
                   <a:srgbClr val="000000"/>
                 </a:solidFill>
                 <a:latin typeface="Neue Haas Grotesk Text Pro"/>
+                <a:ea typeface="DejaVu Sans"/>
               </a:rPr>
               <a:t>Dades presentacions sprint: 4 de maig, 7 de maig</a:t>
             </a:r>
@@ -5109,6 +7168,7 @@
                   <a:srgbClr val="000000"/>
                 </a:solidFill>
                 <a:latin typeface="Neue Haas Grotesk Text Pro"/>
+                <a:ea typeface="DejaVu Sans"/>
               </a:rPr>
               <a:t>Data finalització sprint: 10 de maig</a:t>
             </a:r>
@@ -5120,14 +7180,14 @@
       </p:sp>
       <p:sp>
         <p:nvSpPr>
-          <p:cNvPr id="100" name="TextShape 3"/>
+          <p:cNvPr id="141" name="TextShape 3"/>
           <p:cNvSpPr/>
           <p:nvPr/>
         </p:nvSpPr>
         <p:spPr>
           <a:xfrm>
             <a:off x="8540640" y="6356520"/>
-            <a:ext cx="2742480" cy="364320"/>
+            <a:ext cx="2742120" cy="363960"/>
           </a:xfrm>
           <a:prstGeom prst="rect">
             <a:avLst/>
@@ -5153,12 +7213,13 @@
                 <a:spcPct val="100000"/>
               </a:lnSpc>
             </a:pPr>
-            <a:fld id="{2CEC6175-C7F5-4F73-9F73-00A6C18ADB9C}" type="slidenum">
+            <a:fld id="{7D229B37-E73E-4C3A-87FB-FED026243345}" type="slidenum">
               <a:rPr b="0" lang="en-GB" sz="1200" spc="-1" strike="noStrike">
                 <a:solidFill>
                   <a:srgbClr val="8b8b8b"/>
                 </a:solidFill>
                 <a:latin typeface="Neue Haas Grotesk Text Pro"/>
+                <a:ea typeface="DejaVu Sans"/>
               </a:rPr>
               <a:t>&lt;number&gt;</a:t>
             </a:fld>
@@ -5200,14 +7261,14 @@
       </p:grpSpPr>
       <p:sp>
         <p:nvSpPr>
-          <p:cNvPr id="101" name="TextShape 1"/>
+          <p:cNvPr id="142" name="TextShape 1"/>
           <p:cNvSpPr/>
           <p:nvPr/>
         </p:nvSpPr>
         <p:spPr>
           <a:xfrm>
             <a:off x="1115640" y="548640"/>
-            <a:ext cx="10167480" cy="1179000"/>
+            <a:ext cx="10167120" cy="1178640"/>
           </a:xfrm>
           <a:prstGeom prst="rect">
             <a:avLst/>
@@ -5239,6 +7300,7 @@
                   <a:srgbClr val="000000"/>
                 </a:solidFill>
                 <a:latin typeface="Neue Haas Grotesk Text Pro"/>
+                <a:ea typeface="DejaVu Sans"/>
               </a:rPr>
               <a:t>Tasques fetes al sprint</a:t>
             </a:r>
@@ -5250,14 +7312,14 @@
       </p:sp>
       <p:sp>
         <p:nvSpPr>
-          <p:cNvPr id="102" name="TextShape 2"/>
+          <p:cNvPr id="143" name="TextShape 2"/>
           <p:cNvSpPr/>
           <p:nvPr/>
         </p:nvSpPr>
         <p:spPr>
           <a:xfrm>
             <a:off x="8540640" y="6356520"/>
-            <a:ext cx="2742480" cy="364320"/>
+            <a:ext cx="2742120" cy="363960"/>
           </a:xfrm>
           <a:prstGeom prst="rect">
             <a:avLst/>
@@ -5283,12 +7345,13 @@
                 <a:spcPct val="100000"/>
               </a:lnSpc>
             </a:pPr>
-            <a:fld id="{6027477D-5BCD-46A0-9823-FD42EFDC585B}" type="slidenum">
+            <a:fld id="{9CD811DD-0210-4795-8982-4C577DC71BAA}" type="slidenum">
               <a:rPr b="0" lang="en-GB" sz="1200" spc="-1" strike="noStrike">
                 <a:solidFill>
                   <a:srgbClr val="8b8b8b"/>
                 </a:solidFill>
                 <a:latin typeface="Neue Haas Grotesk Text Pro"/>
+                <a:ea typeface="DejaVu Sans"/>
               </a:rPr>
               <a:t>&lt;number&gt;</a:t>
             </a:fld>
@@ -5300,14 +7363,14 @@
       </p:sp>
       <p:sp>
         <p:nvSpPr>
-          <p:cNvPr id="103" name="CustomShape 3"/>
+          <p:cNvPr id="144" name="CustomShape 3"/>
           <p:cNvSpPr/>
           <p:nvPr/>
         </p:nvSpPr>
         <p:spPr>
           <a:xfrm>
             <a:off x="428760" y="2198880"/>
-            <a:ext cx="10020240" cy="2279880"/>
+            <a:ext cx="10019880" cy="2279880"/>
           </a:xfrm>
           <a:prstGeom prst="rect">
             <a:avLst/>
@@ -5541,14 +7604,14 @@
       </p:grpSpPr>
       <p:sp>
         <p:nvSpPr>
-          <p:cNvPr id="104" name="TextShape 1"/>
+          <p:cNvPr id="145" name="TextShape 1"/>
           <p:cNvSpPr/>
           <p:nvPr/>
         </p:nvSpPr>
         <p:spPr>
           <a:xfrm>
             <a:off x="1115640" y="548640"/>
-            <a:ext cx="10167480" cy="1179000"/>
+            <a:ext cx="10167120" cy="1178640"/>
           </a:xfrm>
           <a:prstGeom prst="rect">
             <a:avLst/>
@@ -5580,6 +7643,7 @@
                   <a:srgbClr val="000000"/>
                 </a:solidFill>
                 <a:latin typeface="Neue Haas Grotesk Text Pro"/>
+                <a:ea typeface="DejaVu Sans"/>
               </a:rPr>
               <a:t>Casos d’Ús</a:t>
             </a:r>
@@ -5591,14 +7655,14 @@
       </p:sp>
       <p:sp>
         <p:nvSpPr>
-          <p:cNvPr id="105" name="TextShape 2"/>
+          <p:cNvPr id="146" name="TextShape 2"/>
           <p:cNvSpPr/>
           <p:nvPr/>
         </p:nvSpPr>
         <p:spPr>
           <a:xfrm>
             <a:off x="8540640" y="6356520"/>
-            <a:ext cx="2742480" cy="364320"/>
+            <a:ext cx="2742120" cy="363960"/>
           </a:xfrm>
           <a:prstGeom prst="rect">
             <a:avLst/>
@@ -5624,12 +7688,13 @@
                 <a:spcPct val="100000"/>
               </a:lnSpc>
             </a:pPr>
-            <a:fld id="{4A5B43A6-38C9-48FE-8637-5FB9AE5ABECC}" type="slidenum">
+            <a:fld id="{DD9F1792-BF07-4D35-A26E-44273F596B25}" type="slidenum">
               <a:rPr b="0" lang="en-GB" sz="1200" spc="-1" strike="noStrike">
                 <a:solidFill>
                   <a:srgbClr val="8b8b8b"/>
                 </a:solidFill>
                 <a:latin typeface="Neue Haas Grotesk Text Pro"/>
+                <a:ea typeface="DejaVu Sans"/>
               </a:rPr>
               <a:t>&lt;number&gt;</a:t>
             </a:fld>
@@ -5639,117 +7704,52 @@
           </a:p>
         </p:txBody>
       </p:sp>
-      <p:sp>
-        <p:nvSpPr>
-          <p:cNvPr id="106" name="CustomShape 3"/>
-          <p:cNvSpPr/>
+      <p:pic>
+        <p:nvPicPr>
+          <p:cNvPr id="147" name="" descr=""/>
+          <p:cNvPicPr/>
           <p:nvPr/>
-        </p:nvSpPr>
-        <p:spPr>
-          <a:xfrm>
-            <a:off x="428760" y="2198880"/>
-            <a:ext cx="11265480" cy="2009880"/>
-          </a:xfrm>
-          <a:prstGeom prst="rect">
-            <a:avLst/>
-          </a:prstGeom>
-          <a:noFill/>
-          <a:ln w="0">
-            <a:noFill/>
-          </a:ln>
-        </p:spPr>
-        <p:style>
-          <a:lnRef idx="0"/>
-          <a:fillRef idx="0"/>
-          <a:effectRef idx="0"/>
-          <a:fontRef idx="minor"/>
-        </p:style>
-        <p:txBody>
-          <a:bodyPr lIns="90000" rIns="90000" tIns="45000" bIns="45000" anchor="t">
-            <a:spAutoFit/>
-          </a:bodyPr>
-          <a:p>
-            <a:pPr algn="just">
-              <a:lnSpc>
-                <a:spcPct val="100000"/>
-              </a:lnSpc>
-            </a:pPr>
-            <a:r>
-              <a:rPr b="0" lang="en-GB" sz="1800" spc="-1" strike="noStrike">
-                <a:solidFill>
-                  <a:srgbClr val="000000"/>
-                </a:solidFill>
-                <a:latin typeface="Neue Haas Grotesk Text Pro"/>
-                <a:ea typeface="DejaVu Sans"/>
-              </a:rPr>
-              <a:t>En aquesta secció de la presentació (pot ser més d’una transparència) volem una primera aproximació als diagrames de casos d’ús. </a:t>
-            </a:r>
-            <a:endParaRPr b="0" lang="en-GB" sz="1800" spc="-1" strike="noStrike">
-              <a:latin typeface="Arial"/>
-            </a:endParaRPr>
-          </a:p>
-          <a:p>
-            <a:pPr algn="just">
-              <a:lnSpc>
-                <a:spcPct val="100000"/>
-              </a:lnSpc>
-            </a:pPr>
-            <a:endParaRPr b="0" lang="en-GB" sz="1800" spc="-1" strike="noStrike">
-              <a:latin typeface="Arial"/>
-            </a:endParaRPr>
-          </a:p>
-          <a:p>
-            <a:pPr algn="just">
-              <a:lnSpc>
-                <a:spcPct val="100000"/>
-              </a:lnSpc>
-            </a:pPr>
-            <a:r>
-              <a:rPr b="0" lang="en-GB" sz="1800" spc="-1" strike="noStrike">
-                <a:solidFill>
-                  <a:srgbClr val="000000"/>
-                </a:solidFill>
-                <a:latin typeface="Neue Haas Grotesk Text Pro"/>
-                <a:ea typeface="DejaVu Sans"/>
-              </a:rPr>
-              <a:t>Com a recomanació, primer podríeu fer un llistat de les funcionalitats que fa cadascú dels perfils d’usuari i dibuixar el diagrama de casos d’us per cadascú d’ells. </a:t>
-            </a:r>
-            <a:endParaRPr b="0" lang="en-GB" sz="1800" spc="-1" strike="noStrike">
-              <a:latin typeface="Arial"/>
-            </a:endParaRPr>
-          </a:p>
-          <a:p>
-            <a:pPr algn="just">
-              <a:lnSpc>
-                <a:spcPct val="100000"/>
-              </a:lnSpc>
-            </a:pPr>
-            <a:endParaRPr b="0" lang="en-GB" sz="1800" spc="-1" strike="noStrike">
-              <a:latin typeface="Arial"/>
-            </a:endParaRPr>
-          </a:p>
-          <a:p>
-            <a:pPr algn="just">
-              <a:lnSpc>
-                <a:spcPct val="100000"/>
-              </a:lnSpc>
-            </a:pPr>
-            <a:r>
-              <a:rPr b="0" lang="en-GB" sz="1800" spc="-1" strike="noStrike">
-                <a:solidFill>
-                  <a:srgbClr val="000000"/>
-                </a:solidFill>
-                <a:latin typeface="Neue Haas Grotesk Text Pro"/>
-                <a:ea typeface="DejaVu Sans"/>
-              </a:rPr>
-              <a:t>Desprès, podeu ajuntar tots els diagrames en el que serà el diagrama de Casos d’Ús final</a:t>
-            </a:r>
-            <a:endParaRPr b="0" lang="en-GB" sz="1800" spc="-1" strike="noStrike">
-              <a:latin typeface="Arial"/>
-            </a:endParaRPr>
-          </a:p>
-        </p:txBody>
-      </p:sp>
+        </p:nvPicPr>
+        <p:blipFill>
+          <a:blip r:embed="rId1"/>
+          <a:stretch/>
+        </p:blipFill>
+        <p:spPr>
+          <a:xfrm>
+            <a:off x="900000" y="2160000"/>
+            <a:ext cx="5387400" cy="4007880"/>
+          </a:xfrm>
+          <a:prstGeom prst="rect">
+            <a:avLst/>
+          </a:prstGeom>
+          <a:ln w="0">
+            <a:noFill/>
+          </a:ln>
+        </p:spPr>
+      </p:pic>
+      <p:pic>
+        <p:nvPicPr>
+          <p:cNvPr id="148" name="" descr=""/>
+          <p:cNvPicPr/>
+          <p:nvPr/>
+        </p:nvPicPr>
+        <p:blipFill>
+          <a:blip r:embed="rId2"/>
+          <a:stretch/>
+        </p:blipFill>
+        <p:spPr>
+          <a:xfrm>
+            <a:off x="6287400" y="2229120"/>
+            <a:ext cx="5052600" cy="3854880"/>
+          </a:xfrm>
+          <a:prstGeom prst="rect">
+            <a:avLst/>
+          </a:prstGeom>
+          <a:ln w="0">
+            <a:noFill/>
+          </a:ln>
+        </p:spPr>
+      </p:pic>
     </p:spTree>
   </p:cSld>
   <mc:AlternateContent>
@@ -5782,14 +7782,14 @@
       </p:grpSpPr>
       <p:sp>
         <p:nvSpPr>
-          <p:cNvPr id="107" name="TextShape 1"/>
+          <p:cNvPr id="149" name="TextShape 4"/>
           <p:cNvSpPr/>
           <p:nvPr/>
         </p:nvSpPr>
         <p:spPr>
           <a:xfrm>
             <a:off x="1115640" y="548640"/>
-            <a:ext cx="10167480" cy="1179000"/>
+            <a:ext cx="10167120" cy="1178640"/>
           </a:xfrm>
           <a:prstGeom prst="rect">
             <a:avLst/>
@@ -5821,8 +7821,9 @@
                   <a:srgbClr val="000000"/>
                 </a:solidFill>
                 <a:latin typeface="Neue Haas Grotesk Text Pro"/>
+                <a:ea typeface="DejaVu Sans"/>
               </a:rPr>
-              <a:t>Burn-down chart</a:t>
+              <a:t>Casos d’Ús</a:t>
             </a:r>
             <a:endParaRPr b="0" lang="en-GB" sz="4000" spc="-1" strike="noStrike">
               <a:latin typeface="Arial"/>
@@ -5832,14 +7833,14 @@
       </p:sp>
       <p:sp>
         <p:nvSpPr>
-          <p:cNvPr id="108" name="TextShape 2"/>
+          <p:cNvPr id="150" name="TextShape 5"/>
           <p:cNvSpPr/>
           <p:nvPr/>
         </p:nvSpPr>
         <p:spPr>
           <a:xfrm>
             <a:off x="8540640" y="6356520"/>
-            <a:ext cx="2742480" cy="364320"/>
+            <a:ext cx="2742120" cy="363960"/>
           </a:xfrm>
           <a:prstGeom prst="rect">
             <a:avLst/>
@@ -5865,12 +7866,13 @@
                 <a:spcPct val="100000"/>
               </a:lnSpc>
             </a:pPr>
-            <a:fld id="{B57B9A45-D18B-4608-9638-A660596C24B8}" type="slidenum">
+            <a:fld id="{8AA25B91-CEA9-4AD1-A56F-B3634A398EB6}" type="slidenum">
               <a:rPr b="0" lang="en-GB" sz="1200" spc="-1" strike="noStrike">
                 <a:solidFill>
                   <a:srgbClr val="8b8b8b"/>
                 </a:solidFill>
                 <a:latin typeface="Neue Haas Grotesk Text Pro"/>
+                <a:ea typeface="DejaVu Sans"/>
               </a:rPr>
               <a:t>&lt;number&gt;</a:t>
             </a:fld>
@@ -5880,72 +7882,20 @@
           </a:p>
         </p:txBody>
       </p:sp>
-      <p:sp>
-        <p:nvSpPr>
-          <p:cNvPr id="109" name="CustomShape 3"/>
-          <p:cNvSpPr/>
-          <p:nvPr/>
-        </p:nvSpPr>
-        <p:spPr>
-          <a:xfrm>
-            <a:off x="428760" y="2198880"/>
-            <a:ext cx="11265480" cy="363960"/>
-          </a:xfrm>
-          <a:prstGeom prst="rect">
-            <a:avLst/>
-          </a:prstGeom>
-          <a:noFill/>
-          <a:ln w="0">
-            <a:noFill/>
-          </a:ln>
-        </p:spPr>
-        <p:style>
-          <a:lnRef idx="0"/>
-          <a:fillRef idx="0"/>
-          <a:effectRef idx="0"/>
-          <a:fontRef idx="minor"/>
-        </p:style>
-        <p:txBody>
-          <a:bodyPr lIns="90000" rIns="90000" tIns="45000" bIns="45000" anchor="t">
-            <a:spAutoFit/>
-          </a:bodyPr>
-          <a:p>
-            <a:pPr algn="just">
-              <a:lnSpc>
-                <a:spcPct val="100000"/>
-              </a:lnSpc>
-            </a:pPr>
-            <a:r>
-              <a:rPr b="0" lang="en-GB" sz="1800" spc="-1" strike="noStrike">
-                <a:solidFill>
-                  <a:srgbClr val="000000"/>
-                </a:solidFill>
-                <a:latin typeface="Neue Haas Grotesk Text Pro"/>
-                <a:ea typeface="DejaVu Sans"/>
-              </a:rPr>
-              <a:t>En aquesta transparència volem el vostre burn-down Chart per aquest sprint</a:t>
-            </a:r>
-            <a:endParaRPr b="0" lang="en-GB" sz="1800" spc="-1" strike="noStrike">
-              <a:latin typeface="Arial"/>
-            </a:endParaRPr>
-          </a:p>
-        </p:txBody>
-      </p:sp>
       <p:pic>
         <p:nvPicPr>
-          <p:cNvPr id="110" name="" descr=""/>
+          <p:cNvPr id="151" name="" descr=""/>
           <p:cNvPicPr/>
           <p:nvPr/>
         </p:nvPicPr>
         <p:blipFill>
           <a:blip r:embed="rId1"/>
-          <a:srcRect l="0" t="10416" r="0" b="0"/>
           <a:stretch/>
         </p:blipFill>
         <p:spPr>
           <a:xfrm>
-            <a:off x="2675160" y="2630880"/>
-            <a:ext cx="6837120" cy="4089960"/>
+            <a:off x="3606840" y="2160000"/>
+            <a:ext cx="4673160" cy="4132080"/>
           </a:xfrm>
           <a:prstGeom prst="rect">
             <a:avLst/>
@@ -5969,6 +7919,212 @@
 </file>
 
 <file path=ppt/slides/slide7.xml><?xml version="1.0" encoding="utf-8"?>
+<p:sld xmlns:a="http://schemas.openxmlformats.org/drawingml/2006/main" xmlns:p="http://schemas.openxmlformats.org/presentationml/2006/main" xmlns:r="http://schemas.openxmlformats.org/officeDocument/2006/relationships" xmlns:p14="http://schemas.microsoft.com/office/powerpoint/2010/main" xmlns:p15="http://schemas.microsoft.com/office/powerpoint/2012/main" xmlns:mc="http://schemas.openxmlformats.org/markup-compatibility/2006">
+  <p:cSld>
+    <p:spTree>
+      <p:nvGrpSpPr>
+        <p:cNvPr id="1" name=""/>
+        <p:cNvGrpSpPr/>
+        <p:nvPr/>
+      </p:nvGrpSpPr>
+      <p:grpSpPr>
+        <a:xfrm>
+          <a:off x="0" y="0"/>
+          <a:ext cx="0" cy="0"/>
+          <a:chOff x="0" y="0"/>
+          <a:chExt cx="0" cy="0"/>
+        </a:xfrm>
+      </p:grpSpPr>
+      <p:sp>
+        <p:nvSpPr>
+          <p:cNvPr id="152" name="TextShape 1"/>
+          <p:cNvSpPr/>
+          <p:nvPr/>
+        </p:nvSpPr>
+        <p:spPr>
+          <a:xfrm>
+            <a:off x="1115640" y="548640"/>
+            <a:ext cx="10167120" cy="1178640"/>
+          </a:xfrm>
+          <a:prstGeom prst="rect">
+            <a:avLst/>
+          </a:prstGeom>
+          <a:noFill/>
+          <a:ln w="0">
+            <a:noFill/>
+          </a:ln>
+        </p:spPr>
+        <p:style>
+          <a:lnRef idx="0"/>
+          <a:fillRef idx="0"/>
+          <a:effectRef idx="0"/>
+          <a:fontRef idx="minor"/>
+        </p:style>
+        <p:txBody>
+          <a:bodyPr lIns="90000" rIns="90000" tIns="45000" bIns="45000" anchor="ctr">
+            <a:noAutofit/>
+          </a:bodyPr>
+          <a:p>
+            <a:pPr>
+              <a:lnSpc>
+                <a:spcPct val="90000"/>
+              </a:lnSpc>
+            </a:pPr>
+            <a:r>
+              <a:rPr b="1" lang="es-ES" sz="4000" spc="-1" strike="noStrike">
+                <a:solidFill>
+                  <a:srgbClr val="000000"/>
+                </a:solidFill>
+                <a:latin typeface="Neue Haas Grotesk Text Pro"/>
+                <a:ea typeface="DejaVu Sans"/>
+              </a:rPr>
+              <a:t>Burn-down chart</a:t>
+            </a:r>
+            <a:endParaRPr b="0" lang="en-GB" sz="4000" spc="-1" strike="noStrike">
+              <a:latin typeface="Arial"/>
+            </a:endParaRPr>
+          </a:p>
+        </p:txBody>
+      </p:sp>
+      <p:sp>
+        <p:nvSpPr>
+          <p:cNvPr id="153" name="TextShape 2"/>
+          <p:cNvSpPr/>
+          <p:nvPr/>
+        </p:nvSpPr>
+        <p:spPr>
+          <a:xfrm>
+            <a:off x="8540640" y="6356520"/>
+            <a:ext cx="2742120" cy="363960"/>
+          </a:xfrm>
+          <a:prstGeom prst="rect">
+            <a:avLst/>
+          </a:prstGeom>
+          <a:noFill/>
+          <a:ln w="0">
+            <a:noFill/>
+          </a:ln>
+        </p:spPr>
+        <p:style>
+          <a:lnRef idx="0"/>
+          <a:fillRef idx="0"/>
+          <a:effectRef idx="0"/>
+          <a:fontRef idx="minor"/>
+        </p:style>
+        <p:txBody>
+          <a:bodyPr lIns="90000" rIns="90000" tIns="45000" bIns="45000" anchor="ctr">
+            <a:noAutofit/>
+          </a:bodyPr>
+          <a:p>
+            <a:pPr algn="r">
+              <a:lnSpc>
+                <a:spcPct val="100000"/>
+              </a:lnSpc>
+            </a:pPr>
+            <a:fld id="{33CD137E-BAF5-43AB-BE8E-87D47BFCB5BE}" type="slidenum">
+              <a:rPr b="0" lang="en-GB" sz="1200" spc="-1" strike="noStrike">
+                <a:solidFill>
+                  <a:srgbClr val="8b8b8b"/>
+                </a:solidFill>
+                <a:latin typeface="Neue Haas Grotesk Text Pro"/>
+                <a:ea typeface="DejaVu Sans"/>
+              </a:rPr>
+              <a:t>&lt;number&gt;</a:t>
+            </a:fld>
+            <a:endParaRPr b="0" lang="en-GB" sz="1200" spc="-1" strike="noStrike">
+              <a:latin typeface="Arial"/>
+            </a:endParaRPr>
+          </a:p>
+        </p:txBody>
+      </p:sp>
+      <p:sp>
+        <p:nvSpPr>
+          <p:cNvPr id="154" name="CustomShape 3"/>
+          <p:cNvSpPr/>
+          <p:nvPr/>
+        </p:nvSpPr>
+        <p:spPr>
+          <a:xfrm>
+            <a:off x="428760" y="2198880"/>
+            <a:ext cx="11265120" cy="363960"/>
+          </a:xfrm>
+          <a:prstGeom prst="rect">
+            <a:avLst/>
+          </a:prstGeom>
+          <a:noFill/>
+          <a:ln w="0">
+            <a:noFill/>
+          </a:ln>
+        </p:spPr>
+        <p:style>
+          <a:lnRef idx="0"/>
+          <a:fillRef idx="0"/>
+          <a:effectRef idx="0"/>
+          <a:fontRef idx="minor"/>
+        </p:style>
+        <p:txBody>
+          <a:bodyPr lIns="90000" rIns="90000" tIns="45000" bIns="45000" anchor="t">
+            <a:spAutoFit/>
+          </a:bodyPr>
+          <a:p>
+            <a:pPr algn="just">
+              <a:lnSpc>
+                <a:spcPct val="100000"/>
+              </a:lnSpc>
+            </a:pPr>
+            <a:r>
+              <a:rPr b="0" lang="en-GB" sz="1800" spc="-1" strike="noStrike">
+                <a:solidFill>
+                  <a:srgbClr val="000000"/>
+                </a:solidFill>
+                <a:latin typeface="Neue Haas Grotesk Text Pro"/>
+                <a:ea typeface="DejaVu Sans"/>
+              </a:rPr>
+              <a:t>En aquesta transparència volem el vostre burn-down Chart per aquest sprint</a:t>
+            </a:r>
+            <a:endParaRPr b="0" lang="en-GB" sz="1800" spc="-1" strike="noStrike">
+              <a:latin typeface="Arial"/>
+            </a:endParaRPr>
+          </a:p>
+        </p:txBody>
+      </p:sp>
+      <p:pic>
+        <p:nvPicPr>
+          <p:cNvPr id="155" name="" descr=""/>
+          <p:cNvPicPr/>
+          <p:nvPr/>
+        </p:nvPicPr>
+        <p:blipFill>
+          <a:blip r:embed="rId1"/>
+          <a:stretch/>
+        </p:blipFill>
+        <p:spPr>
+          <a:xfrm>
+            <a:off x="2700000" y="2593080"/>
+            <a:ext cx="6840000" cy="4127400"/>
+          </a:xfrm>
+          <a:prstGeom prst="rect">
+            <a:avLst/>
+          </a:prstGeom>
+          <a:ln w="0">
+            <a:noFill/>
+          </a:ln>
+        </p:spPr>
+      </p:pic>
+    </p:spTree>
+  </p:cSld>
+  <mc:AlternateContent>
+    <mc:Choice Requires="p14">
+      <p:transition spd="slow" p14:dur="2000"/>
+    </mc:Choice>
+    <mc:Fallback>
+      <p:transition spd="slow"/>
+    </mc:Fallback>
+  </mc:AlternateContent>
+</p:sld>
+</file>
+
+<file path=ppt/slides/slide8.xml><?xml version="1.0" encoding="utf-8"?>
 <p:sld xmlns:a="http://schemas.openxmlformats.org/drawingml/2006/main" xmlns:p="http://schemas.openxmlformats.org/presentationml/2006/main" xmlns:r="http://schemas.openxmlformats.org/officeDocument/2006/relationships" xmlns:p14="http://schemas.microsoft.com/office/powerpoint/2010/main" xmlns:p15="http://schemas.microsoft.com/office/powerpoint/2012/main" xmlns:mc="http://schemas.openxmlformats.org/markup-compatibility/2006">
   <p:cSld>
     <p:bg>
@@ -5994,14 +8150,14 @@
       </p:grpSpPr>
       <p:sp>
         <p:nvSpPr>
-          <p:cNvPr id="111" name="CustomShape 1"/>
+          <p:cNvPr id="156" name="CustomShape 1"/>
           <p:cNvSpPr/>
           <p:nvPr/>
         </p:nvSpPr>
         <p:spPr>
           <a:xfrm>
             <a:off x="0" y="0"/>
-            <a:ext cx="12191400" cy="6857280"/>
+            <a:ext cx="12191040" cy="6856920"/>
           </a:xfrm>
           <a:prstGeom prst="rect">
             <a:avLst/>
@@ -6030,7 +8186,7 @@
       </p:sp>
       <p:pic>
         <p:nvPicPr>
-          <p:cNvPr id="112" name="Picture 3" descr=""/>
+          <p:cNvPr id="157" name="Picture 3" descr=""/>
           <p:cNvPicPr/>
           <p:nvPr/>
         </p:nvPicPr>
@@ -6042,7 +8198,7 @@
         <p:spPr>
           <a:xfrm>
             <a:off x="0" y="0"/>
-            <a:ext cx="8667720" cy="6857280"/>
+            <a:ext cx="8667360" cy="6856920"/>
           </a:xfrm>
           <a:prstGeom prst="rect">
             <a:avLst/>
@@ -6054,14 +8210,14 @@
       </p:pic>
       <p:sp>
         <p:nvSpPr>
-          <p:cNvPr id="113" name="CustomShape 2"/>
+          <p:cNvPr id="158" name="CustomShape 2"/>
           <p:cNvSpPr/>
           <p:nvPr/>
         </p:nvSpPr>
         <p:spPr>
           <a:xfrm flipH="1">
             <a:off x="3710880" y="0"/>
-            <a:ext cx="8479800" cy="6857280"/>
+            <a:ext cx="8479440" cy="6856920"/>
           </a:xfrm>
           <a:prstGeom prst="rect">
             <a:avLst/>
@@ -6078,7 +8234,7 @@
                 <a:srgbClr val="ffffff"/>
               </a:gs>
             </a:gsLst>
-            <a:lin ang="0"/>
+            <a:lin ang="10800000"/>
           </a:gradFill>
           <a:ln>
             <a:noFill/>
@@ -6101,14 +8257,14 @@
       </p:sp>
       <p:sp>
         <p:nvSpPr>
-          <p:cNvPr id="114" name="TextShape 3"/>
+          <p:cNvPr id="159" name="TextShape 3"/>
           <p:cNvSpPr/>
           <p:nvPr/>
         </p:nvSpPr>
         <p:spPr>
           <a:xfrm>
             <a:off x="7848720" y="1122480"/>
-            <a:ext cx="4022640" cy="3203280"/>
+            <a:ext cx="4022280" cy="3202920"/>
           </a:xfrm>
           <a:prstGeom prst="rect">
             <a:avLst/>
@@ -6140,6 +8296,7 @@
                   <a:srgbClr val="000000"/>
                 </a:solidFill>
                 <a:latin typeface="Neue Haas Grotesk Text Pro"/>
+                <a:ea typeface="DejaVu Sans"/>
               </a:rPr>
               <a:t>Enginyeria del Software</a:t>
             </a:r>
@@ -6151,14 +8308,14 @@
       </p:sp>
       <p:sp>
         <p:nvSpPr>
-          <p:cNvPr id="115" name="CustomShape 4"/>
+          <p:cNvPr id="160" name="CustomShape 4"/>
           <p:cNvSpPr/>
           <p:nvPr/>
         </p:nvSpPr>
         <p:spPr>
           <a:xfrm rot="5400000">
-            <a:off x="8131320" y="345960"/>
-            <a:ext cx="145440" cy="703440"/>
+            <a:off x="8131680" y="345600"/>
+            <a:ext cx="145080" cy="703080"/>
           </a:xfrm>
           <a:prstGeom prst="rect">
             <a:avLst/>
@@ -6187,14 +8344,14 @@
       </p:sp>
       <p:sp>
         <p:nvSpPr>
-          <p:cNvPr id="116" name="CustomShape 5"/>
+          <p:cNvPr id="161" name="CustomShape 5"/>
           <p:cNvSpPr/>
           <p:nvPr/>
         </p:nvSpPr>
         <p:spPr>
           <a:xfrm>
             <a:off x="7851600" y="4546800"/>
-            <a:ext cx="4022640" cy="17640"/>
+            <a:ext cx="4022280" cy="17280"/>
           </a:xfrm>
           <a:prstGeom prst="rect">
             <a:avLst/>
@@ -6207,10 +8364,7 @@
           </a:solidFill>
           <a:ln w="3240">
             <a:solidFill>
-              <a:srgbClr val="412426">
-                <a:lumMod val="25000"/>
-                <a:lumOff val="75000"/>
-              </a:srgbClr>
+              <a:srgbClr val="dbbdbf"/>
             </a:solidFill>
             <a:round/>
           </a:ln>
@@ -6232,14 +8386,14 @@
       </p:sp>
       <p:sp>
         <p:nvSpPr>
-          <p:cNvPr id="117" name="CustomShape 6"/>
+          <p:cNvPr id="162" name="CustomShape 6"/>
           <p:cNvSpPr/>
           <p:nvPr/>
         </p:nvSpPr>
         <p:spPr>
           <a:xfrm>
             <a:off x="7848720" y="4872960"/>
-            <a:ext cx="4022640" cy="1358640"/>
+            <a:ext cx="4022280" cy="1358280"/>
           </a:xfrm>
           <a:prstGeom prst="rect">
             <a:avLst/>
@@ -6568,6 +8722,232 @@
       </a:dk1>
       <a:lt1>
         <a:srgbClr val="ffffff"/>
+      </a:lt1>
+      <a:dk2>
+        <a:srgbClr val="412426"/>
+      </a:dk2>
+      <a:lt2>
+        <a:srgbClr val="e2e8e8"/>
+      </a:lt2>
+      <a:accent1>
+        <a:srgbClr val="c34d54"/>
+      </a:accent1>
+      <a:accent2>
+        <a:srgbClr val="b1643b"/>
+      </a:accent2>
+      <a:accent3>
+        <a:srgbClr val="bba149"/>
+      </a:accent3>
+      <a:accent4>
+        <a:srgbClr val="98ad39"/>
+      </a:accent4>
+      <a:accent5>
+        <a:srgbClr val="72b346"/>
+      </a:accent5>
+      <a:accent6>
+        <a:srgbClr val="3bb13d"/>
+      </a:accent6>
+      <a:hlink>
+        <a:srgbClr val="30928b"/>
+      </a:hlink>
+      <a:folHlink>
+        <a:srgbClr val="7f7f7f"/>
+      </a:folHlink>
+    </a:clrScheme>
+    <a:fontScheme name="Office">
+      <a:majorFont>
+        <a:latin typeface="Arial"/>
+        <a:ea typeface="DejaVu Sans"/>
+        <a:cs typeface="DejaVu Sans"/>
+      </a:majorFont>
+      <a:minorFont>
+        <a:latin typeface="Arial"/>
+        <a:ea typeface="DejaVu Sans"/>
+        <a:cs typeface="DejaVu Sans"/>
+      </a:minorFont>
+    </a:fontScheme>
+    <a:fmtScheme name="Office">
+      <a:fillStyleLst>
+        <a:solidFill>
+          <a:schemeClr val="phClr"/>
+        </a:solidFill>
+        <a:gradFill rotWithShape="1">
+          <a:gsLst>
+            <a:gs pos="0">
+              <a:schemeClr val="phClr">
+                <a:tint val="50000"/>
+                <a:satMod val="300000"/>
+              </a:schemeClr>
+            </a:gs>
+            <a:gs pos="35000">
+              <a:schemeClr val="phClr">
+                <a:tint val="37000"/>
+                <a:satMod val="300000"/>
+              </a:schemeClr>
+            </a:gs>
+            <a:gs pos="100000">
+              <a:schemeClr val="phClr">
+                <a:tint val="15000"/>
+                <a:satMod val="350000"/>
+              </a:schemeClr>
+            </a:gs>
+          </a:gsLst>
+          <a:lin ang="16200000" scaled="1"/>
+        </a:gradFill>
+        <a:gradFill rotWithShape="1">
+          <a:gsLst>
+            <a:gs pos="0">
+              <a:schemeClr val="phClr">
+                <a:shade val="51000"/>
+                <a:satMod val="130000"/>
+              </a:schemeClr>
+            </a:gs>
+            <a:gs pos="80000">
+              <a:schemeClr val="phClr">
+                <a:shade val="93000"/>
+                <a:satMod val="130000"/>
+              </a:schemeClr>
+            </a:gs>
+            <a:gs pos="100000">
+              <a:schemeClr val="phClr">
+                <a:shade val="94000"/>
+                <a:satMod val="135000"/>
+              </a:schemeClr>
+            </a:gs>
+          </a:gsLst>
+          <a:lin ang="16200000" scaled="0"/>
+        </a:gradFill>
+      </a:fillStyleLst>
+      <a:lnStyleLst>
+        <a:ln w="9525" cap="flat" cmpd="sng" algn="ctr">
+          <a:solidFill>
+            <a:schemeClr val="phClr">
+              <a:shade val="95000"/>
+              <a:satMod val="105000"/>
+            </a:schemeClr>
+          </a:solidFill>
+          <a:prstDash val="solid"/>
+          <a:miter/>
+        </a:ln>
+        <a:ln w="25400" cap="flat" cmpd="sng" algn="ctr">
+          <a:solidFill>
+            <a:schemeClr val="phClr"/>
+          </a:solidFill>
+          <a:prstDash val="solid"/>
+          <a:miter/>
+        </a:ln>
+        <a:ln w="38100" cap="flat" cmpd="sng" algn="ctr">
+          <a:solidFill>
+            <a:schemeClr val="phClr"/>
+          </a:solidFill>
+          <a:prstDash val="solid"/>
+          <a:miter/>
+        </a:ln>
+      </a:lnStyleLst>
+      <a:effectStyleLst>
+        <a:effectStyle>
+          <a:effectLst>
+            <a:outerShdw blurRad="40000" dist="20000" dir="5400000" rotWithShape="0">
+              <a:srgbClr val="000000">
+                <a:alpha val="38000"/>
+              </a:srgbClr>
+            </a:outerShdw>
+          </a:effectLst>
+        </a:effectStyle>
+        <a:effectStyle>
+          <a:effectLst>
+            <a:outerShdw blurRad="40000" dist="23000" dir="5400000" rotWithShape="0">
+              <a:srgbClr val="000000">
+                <a:alpha val="35000"/>
+              </a:srgbClr>
+            </a:outerShdw>
+          </a:effectLst>
+        </a:effectStyle>
+        <a:effectStyle>
+          <a:effectLst>
+            <a:outerShdw blurRad="40000" dist="23000" dir="5400000" rotWithShape="0">
+              <a:srgbClr val="000000">
+                <a:alpha val="35000"/>
+              </a:srgbClr>
+            </a:outerShdw>
+          </a:effectLst>
+          <a:scene3d>
+            <a:camera prst="orthographicFront">
+              <a:rot lat="0" lon="0" rev="0"/>
+            </a:camera>
+            <a:lightRig rig="threePt" dir="t">
+              <a:rot lat="0" lon="0" rev="1200000"/>
+            </a:lightRig>
+          </a:scene3d>
+          <a:sp3d>
+            <a:bevelT w="63500" h="25400"/>
+          </a:sp3d>
+        </a:effectStyle>
+      </a:effectStyleLst>
+      <a:bgFillStyleLst>
+        <a:solidFill>
+          <a:schemeClr val="phClr"/>
+        </a:solidFill>
+        <a:gradFill rotWithShape="1">
+          <a:gsLst>
+            <a:gs pos="0">
+              <a:schemeClr val="phClr">
+                <a:tint val="40000"/>
+                <a:satMod val="350000"/>
+              </a:schemeClr>
+            </a:gs>
+            <a:gs pos="40000">
+              <a:schemeClr val="phClr">
+                <a:tint val="45000"/>
+                <a:shade val="99000"/>
+                <a:satMod val="350000"/>
+              </a:schemeClr>
+            </a:gs>
+            <a:gs pos="100000">
+              <a:schemeClr val="phClr">
+                <a:shade val="20000"/>
+                <a:satMod val="255000"/>
+              </a:schemeClr>
+            </a:gs>
+          </a:gsLst>
+          <a:path path="circle">
+            <a:fillToRect l="50000" t="-80000" r="50000" b="180000"/>
+          </a:path>
+        </a:gradFill>
+        <a:gradFill rotWithShape="1">
+          <a:gsLst>
+            <a:gs pos="0">
+              <a:schemeClr val="phClr">
+                <a:tint val="80000"/>
+                <a:satMod val="300000"/>
+              </a:schemeClr>
+            </a:gs>
+            <a:gs pos="100000">
+              <a:schemeClr val="phClr">
+                <a:shade val="30000"/>
+                <a:satMod val="200000"/>
+              </a:schemeClr>
+            </a:gs>
+          </a:gsLst>
+          <a:path path="circle">
+            <a:fillToRect l="50000" t="50000" r="50000" b="50000"/>
+          </a:path>
+        </a:gradFill>
+      </a:bgFillStyleLst>
+    </a:fmtScheme>
+  </a:themeElements>
+</a:theme>
+</file>
+
+<file path=ppt/theme/theme3.xml><?xml version="1.0" encoding="utf-8"?>
+<a:theme xmlns:a="http://schemas.openxmlformats.org/drawingml/2006/main" name="Office Theme">
+  <a:themeElements>
+    <a:clrScheme name="Office">
+      <a:dk1>
+        <a:sysClr val="windowText" lastClr="000000"/>
+      </a:dk1>
+      <a:lt1>
+        <a:sysClr val="window" lastClr="FFFFFF"/>
       </a:lt1>
       <a:dk2>
         <a:srgbClr val="412426"/>
